--- a/20260722/20260722_성녀 마리아 막달레나 축일.pptx
+++ b/20260722/20260722_성녀 마리아 막달레나 축일.pptx
@@ -65,10 +65,10 @@
     <p:sldId id="1379" r:id="rId63"/>
     <p:sldId id="1441" r:id="rId64"/>
     <p:sldId id="1492" r:id="rId65"/>
-    <p:sldId id="2532" r:id="rId66"/>
-    <p:sldId id="2533" r:id="rId67"/>
-    <p:sldId id="2534" r:id="rId68"/>
-    <p:sldId id="2535" r:id="rId69"/>
+    <p:sldId id="2543" r:id="rId66"/>
+    <p:sldId id="2544" r:id="rId67"/>
+    <p:sldId id="2545" r:id="rId68"/>
+    <p:sldId id="2546" r:id="rId69"/>
     <p:sldId id="2505" r:id="rId70"/>
     <p:sldId id="893" r:id="rId71"/>
   </p:sldIdLst>
@@ -1905,342 +1905,6 @@
     <p:extLst>
       <p:ext uri="{BB962C8B-B14F-4D97-AF65-F5344CB8AC3E}">
         <p14:creationId xmlns="" xmlns:p14="http://schemas.microsoft.com/office/powerpoint/2010/main" val="411897028"/>
-      </p:ext>
-    </p:extLst>
-  </p:cSld>
-  <p:clrMapOvr>
-    <a:masterClrMapping/>
-  </p:clrMapOvr>
-</p:notes>
-</file>
-
-<file path=ppt/notesSlides/notesSlide32.xml><?xml version="1.0" encoding="utf-8"?>
-<p:notes xmlns:a="http://schemas.openxmlformats.org/drawingml/2006/main" xmlns:r="http://schemas.openxmlformats.org/officeDocument/2006/relationships" xmlns:p="http://schemas.openxmlformats.org/presentationml/2006/main">
-  <p:cSld>
-    <p:spTree>
-      <p:nvGrpSpPr>
-        <p:cNvPr id="1" name=""/>
-        <p:cNvGrpSpPr/>
-        <p:nvPr/>
-      </p:nvGrpSpPr>
-      <p:grpSpPr>
-        <a:xfrm>
-          <a:off x="0" y="0"/>
-          <a:ext cx="0" cy="0"/>
-          <a:chOff x="0" y="0"/>
-          <a:chExt cx="0" cy="0"/>
-        </a:xfrm>
-      </p:grpSpPr>
-      <p:sp>
-        <p:nvSpPr>
-          <p:cNvPr id="34818" name="Rectangle 2"/>
-          <p:cNvSpPr>
-            <a:spLocks noGrp="1" noRot="1" noChangeAspect="1" noChangeArrowheads="1" noTextEdit="1"/>
-          </p:cNvSpPr>
-          <p:nvPr>
-            <p:ph type="sldImg"/>
-          </p:nvPr>
-        </p:nvSpPr>
-        <p:spPr>
-          <a:xfrm>
-            <a:off x="381000" y="685800"/>
-            <a:ext cx="6096000" cy="3429000"/>
-          </a:xfrm>
-          <a:ln/>
-        </p:spPr>
-      </p:sp>
-      <p:sp>
-        <p:nvSpPr>
-          <p:cNvPr id="34819" name="Rectangle 3"/>
-          <p:cNvSpPr>
-            <a:spLocks noGrp="1" noChangeArrowheads="1"/>
-          </p:cNvSpPr>
-          <p:nvPr>
-            <p:ph type="body" idx="1"/>
-          </p:nvPr>
-        </p:nvSpPr>
-        <p:spPr>
-          <a:noFill/>
-          <a:ln/>
-        </p:spPr>
-        <p:txBody>
-          <a:bodyPr/>
-          <a:lstStyle/>
-          <a:p>
-            <a:r>
-              <a:rPr lang="ko-KR" altLang="en-US" dirty="0"/>
-              <a:t/>
-            </a:r>
-            <a:br>
-              <a:rPr lang="ko-KR" altLang="en-US" dirty="0"/>
-            </a:br>
-            <a:r>
-              <a:rPr lang="ko-KR" altLang="en-US" dirty="0"/>
-              <a:t/>
-            </a:r>
-            <a:br>
-              <a:rPr lang="ko-KR" altLang="en-US" dirty="0"/>
-            </a:br>
-            <a:endParaRPr lang="en-AU" altLang="ko-KR" dirty="0"/>
-          </a:p>
-        </p:txBody>
-      </p:sp>
-    </p:spTree>
-    <p:extLst>
-      <p:ext uri="{BB962C8B-B14F-4D97-AF65-F5344CB8AC3E}">
-        <p14:creationId xmlns:p14="http://schemas.microsoft.com/office/powerpoint/2010/main" xmlns="" val="3430105801"/>
-      </p:ext>
-    </p:extLst>
-  </p:cSld>
-  <p:clrMapOvr>
-    <a:masterClrMapping/>
-  </p:clrMapOvr>
-</p:notes>
-</file>
-
-<file path=ppt/notesSlides/notesSlide33.xml><?xml version="1.0" encoding="utf-8"?>
-<p:notes xmlns:a="http://schemas.openxmlformats.org/drawingml/2006/main" xmlns:r="http://schemas.openxmlformats.org/officeDocument/2006/relationships" xmlns:p="http://schemas.openxmlformats.org/presentationml/2006/main">
-  <p:cSld>
-    <p:spTree>
-      <p:nvGrpSpPr>
-        <p:cNvPr id="1" name=""/>
-        <p:cNvGrpSpPr/>
-        <p:nvPr/>
-      </p:nvGrpSpPr>
-      <p:grpSpPr>
-        <a:xfrm>
-          <a:off x="0" y="0"/>
-          <a:ext cx="0" cy="0"/>
-          <a:chOff x="0" y="0"/>
-          <a:chExt cx="0" cy="0"/>
-        </a:xfrm>
-      </p:grpSpPr>
-      <p:sp>
-        <p:nvSpPr>
-          <p:cNvPr id="34818" name="Rectangle 2"/>
-          <p:cNvSpPr>
-            <a:spLocks noGrp="1" noRot="1" noChangeAspect="1" noChangeArrowheads="1" noTextEdit="1"/>
-          </p:cNvSpPr>
-          <p:nvPr>
-            <p:ph type="sldImg"/>
-          </p:nvPr>
-        </p:nvSpPr>
-        <p:spPr>
-          <a:xfrm>
-            <a:off x="381000" y="685800"/>
-            <a:ext cx="6096000" cy="3429000"/>
-          </a:xfrm>
-          <a:ln/>
-        </p:spPr>
-      </p:sp>
-      <p:sp>
-        <p:nvSpPr>
-          <p:cNvPr id="34819" name="Rectangle 3"/>
-          <p:cNvSpPr>
-            <a:spLocks noGrp="1" noChangeArrowheads="1"/>
-          </p:cNvSpPr>
-          <p:nvPr>
-            <p:ph type="body" idx="1"/>
-          </p:nvPr>
-        </p:nvSpPr>
-        <p:spPr>
-          <a:noFill/>
-          <a:ln/>
-        </p:spPr>
-        <p:txBody>
-          <a:bodyPr/>
-          <a:lstStyle/>
-          <a:p>
-            <a:r>
-              <a:rPr lang="ko-KR" altLang="en-US" dirty="0"/>
-              <a:t/>
-            </a:r>
-            <a:br>
-              <a:rPr lang="ko-KR" altLang="en-US" dirty="0"/>
-            </a:br>
-            <a:r>
-              <a:rPr lang="ko-KR" altLang="en-US" dirty="0"/>
-              <a:t/>
-            </a:r>
-            <a:br>
-              <a:rPr lang="ko-KR" altLang="en-US" dirty="0"/>
-            </a:br>
-            <a:endParaRPr lang="en-AU" altLang="ko-KR" dirty="0"/>
-          </a:p>
-        </p:txBody>
-      </p:sp>
-    </p:spTree>
-    <p:extLst>
-      <p:ext uri="{BB962C8B-B14F-4D97-AF65-F5344CB8AC3E}">
-        <p14:creationId xmlns:p14="http://schemas.microsoft.com/office/powerpoint/2010/main" xmlns="" val="3430105801"/>
-      </p:ext>
-    </p:extLst>
-  </p:cSld>
-  <p:clrMapOvr>
-    <a:masterClrMapping/>
-  </p:clrMapOvr>
-</p:notes>
-</file>
-
-<file path=ppt/notesSlides/notesSlide34.xml><?xml version="1.0" encoding="utf-8"?>
-<p:notes xmlns:a="http://schemas.openxmlformats.org/drawingml/2006/main" xmlns:r="http://schemas.openxmlformats.org/officeDocument/2006/relationships" xmlns:p="http://schemas.openxmlformats.org/presentationml/2006/main">
-  <p:cSld>
-    <p:spTree>
-      <p:nvGrpSpPr>
-        <p:cNvPr id="1" name=""/>
-        <p:cNvGrpSpPr/>
-        <p:nvPr/>
-      </p:nvGrpSpPr>
-      <p:grpSpPr>
-        <a:xfrm>
-          <a:off x="0" y="0"/>
-          <a:ext cx="0" cy="0"/>
-          <a:chOff x="0" y="0"/>
-          <a:chExt cx="0" cy="0"/>
-        </a:xfrm>
-      </p:grpSpPr>
-      <p:sp>
-        <p:nvSpPr>
-          <p:cNvPr id="34818" name="Rectangle 2"/>
-          <p:cNvSpPr>
-            <a:spLocks noGrp="1" noRot="1" noChangeAspect="1" noChangeArrowheads="1" noTextEdit="1"/>
-          </p:cNvSpPr>
-          <p:nvPr>
-            <p:ph type="sldImg"/>
-          </p:nvPr>
-        </p:nvSpPr>
-        <p:spPr>
-          <a:xfrm>
-            <a:off x="381000" y="685800"/>
-            <a:ext cx="6096000" cy="3429000"/>
-          </a:xfrm>
-          <a:ln/>
-        </p:spPr>
-      </p:sp>
-      <p:sp>
-        <p:nvSpPr>
-          <p:cNvPr id="34819" name="Rectangle 3"/>
-          <p:cNvSpPr>
-            <a:spLocks noGrp="1" noChangeArrowheads="1"/>
-          </p:cNvSpPr>
-          <p:nvPr>
-            <p:ph type="body" idx="1"/>
-          </p:nvPr>
-        </p:nvSpPr>
-        <p:spPr>
-          <a:noFill/>
-          <a:ln/>
-        </p:spPr>
-        <p:txBody>
-          <a:bodyPr/>
-          <a:lstStyle/>
-          <a:p>
-            <a:r>
-              <a:rPr lang="ko-KR" altLang="en-US" dirty="0"/>
-              <a:t/>
-            </a:r>
-            <a:br>
-              <a:rPr lang="ko-KR" altLang="en-US" dirty="0"/>
-            </a:br>
-            <a:r>
-              <a:rPr lang="ko-KR" altLang="en-US" dirty="0"/>
-              <a:t/>
-            </a:r>
-            <a:br>
-              <a:rPr lang="ko-KR" altLang="en-US" dirty="0"/>
-            </a:br>
-            <a:endParaRPr lang="en-AU" altLang="ko-KR" dirty="0"/>
-          </a:p>
-        </p:txBody>
-      </p:sp>
-    </p:spTree>
-    <p:extLst>
-      <p:ext uri="{BB962C8B-B14F-4D97-AF65-F5344CB8AC3E}">
-        <p14:creationId xmlns:p14="http://schemas.microsoft.com/office/powerpoint/2010/main" xmlns="" val="3093665762"/>
-      </p:ext>
-    </p:extLst>
-  </p:cSld>
-  <p:clrMapOvr>
-    <a:masterClrMapping/>
-  </p:clrMapOvr>
-</p:notes>
-</file>
-
-<file path=ppt/notesSlides/notesSlide35.xml><?xml version="1.0" encoding="utf-8"?>
-<p:notes xmlns:a="http://schemas.openxmlformats.org/drawingml/2006/main" xmlns:r="http://schemas.openxmlformats.org/officeDocument/2006/relationships" xmlns:p="http://schemas.openxmlformats.org/presentationml/2006/main">
-  <p:cSld>
-    <p:spTree>
-      <p:nvGrpSpPr>
-        <p:cNvPr id="1" name=""/>
-        <p:cNvGrpSpPr/>
-        <p:nvPr/>
-      </p:nvGrpSpPr>
-      <p:grpSpPr>
-        <a:xfrm>
-          <a:off x="0" y="0"/>
-          <a:ext cx="0" cy="0"/>
-          <a:chOff x="0" y="0"/>
-          <a:chExt cx="0" cy="0"/>
-        </a:xfrm>
-      </p:grpSpPr>
-      <p:sp>
-        <p:nvSpPr>
-          <p:cNvPr id="34818" name="Rectangle 2"/>
-          <p:cNvSpPr>
-            <a:spLocks noGrp="1" noRot="1" noChangeAspect="1" noChangeArrowheads="1" noTextEdit="1"/>
-          </p:cNvSpPr>
-          <p:nvPr>
-            <p:ph type="sldImg"/>
-          </p:nvPr>
-        </p:nvSpPr>
-        <p:spPr>
-          <a:xfrm>
-            <a:off x="381000" y="685800"/>
-            <a:ext cx="6096000" cy="3429000"/>
-          </a:xfrm>
-          <a:ln/>
-        </p:spPr>
-      </p:sp>
-      <p:sp>
-        <p:nvSpPr>
-          <p:cNvPr id="34819" name="Rectangle 3"/>
-          <p:cNvSpPr>
-            <a:spLocks noGrp="1" noChangeArrowheads="1"/>
-          </p:cNvSpPr>
-          <p:nvPr>
-            <p:ph type="body" idx="1"/>
-          </p:nvPr>
-        </p:nvSpPr>
-        <p:spPr>
-          <a:noFill/>
-          <a:ln/>
-        </p:spPr>
-        <p:txBody>
-          <a:bodyPr/>
-          <a:lstStyle/>
-          <a:p>
-            <a:r>
-              <a:rPr lang="ko-KR" altLang="en-US" dirty="0"/>
-              <a:t/>
-            </a:r>
-            <a:br>
-              <a:rPr lang="ko-KR" altLang="en-US" dirty="0"/>
-            </a:br>
-            <a:r>
-              <a:rPr lang="ko-KR" altLang="en-US" dirty="0"/>
-              <a:t/>
-            </a:r>
-            <a:br>
-              <a:rPr lang="ko-KR" altLang="en-US" dirty="0"/>
-            </a:br>
-            <a:endParaRPr lang="en-AU" altLang="ko-KR" dirty="0"/>
-          </a:p>
-        </p:txBody>
-      </p:sp>
-    </p:spTree>
-    <p:extLst>
-      <p:ext uri="{BB962C8B-B14F-4D97-AF65-F5344CB8AC3E}">
-        <p14:creationId xmlns:p14="http://schemas.microsoft.com/office/powerpoint/2010/main" xmlns="" val="392355683"/>
       </p:ext>
     </p:extLst>
   </p:cSld>
@@ -19882,7 +19546,7 @@
                 <a:latin typeface="바탕" pitchFamily="18" charset="-127"/>
                 <a:ea typeface="바탕" pitchFamily="18" charset="-127"/>
               </a:rPr>
-              <a:t>55</a:t>
+              <a:t>66</a:t>
             </a:r>
             <a:endParaRPr lang="en-US" altLang="ko-KR" sz="4800" b="1" spc="1500" dirty="0">
               <a:latin typeface="바탕" pitchFamily="18" charset="-127"/>
@@ -23981,6 +23645,243 @@
 </p:sld>
 </file>
 
+<file path=ppt/slides/slide29.xml><?xml version="1.0" encoding="utf-8"?>
+<p:sld xmlns:a="http://schemas.openxmlformats.org/drawingml/2006/main" xmlns:p="http://schemas.openxmlformats.org/presentationml/2006/main" xmlns:r="http://schemas.openxmlformats.org/officeDocument/2006/relationships">
+  <p:cSld>
+    <p:bg>
+      <p:bgPr>
+        <a:solidFill>
+          <a:schemeClr val="tx1"/>
+        </a:solidFill>
+        <a:effectLst/>
+      </p:bgPr>
+    </p:bg>
+    <p:spTree>
+      <p:nvGrpSpPr>
+        <p:cNvPr id="1" name=""/>
+        <p:cNvGrpSpPr/>
+        <p:nvPr/>
+      </p:nvGrpSpPr>
+      <p:grpSpPr/>
+      <p:sp>
+        <p:nvSpPr>
+          <p:cNvPr id="9" name="Rectangle 8"/>
+          <p:cNvSpPr/>
+          <p:nvPr/>
+        </p:nvSpPr>
+        <p:spPr>
+          <a:xfrm>
+            <a:off x="35496" y="102371"/>
+            <a:ext cx="9073008" cy="4816703"/>
+          </a:xfrm>
+          <a:prstGeom prst="rect">
+            <a:avLst/>
+          </a:prstGeom>
+        </p:spPr>
+        <p:txBody>
+          <a:bodyPr wrap="square">
+            <a:spAutoFit/>
+          </a:bodyPr>
+          <a:lstStyle/>
+          <a:p>
+            <a:pPr marL="625475" indent="-625475">
+              <a:lnSpc>
+                <a:spcPct val="150000"/>
+              </a:lnSpc>
+              <a:spcAft>
+                <a:spcPts val="2400"/>
+              </a:spcAft>
+            </a:pPr>
+            <a:r>
+              <a:rPr lang="ko-KR" altLang="en-US" sz="3200" dirty="0">
+                <a:solidFill>
+                  <a:schemeClr val="bg1"/>
+                </a:solidFill>
+                <a:latin typeface="바탕" pitchFamily="18" charset="-127"/>
+                <a:ea typeface="바탕" pitchFamily="18" charset="-127"/>
+              </a:rPr>
+              <a:t>●</a:t>
+            </a:r>
+            <a:r>
+              <a:rPr lang="en-US" altLang="ko-KR" sz="3200" b="1" dirty="0">
+                <a:solidFill>
+                  <a:srgbClr val="DDD9C3"/>
+                </a:solidFill>
+                <a:latin typeface="Batang" panose="02030600000101010101" pitchFamily="18" charset="-127"/>
+                <a:ea typeface="Batang" panose="02030600000101010101" pitchFamily="18" charset="-127"/>
+              </a:rPr>
+              <a:t> </a:t>
+            </a:r>
+            <a:r>
+              <a:rPr lang="en-AU" altLang="ko-KR" sz="4000" dirty="0">
+                <a:solidFill>
+                  <a:srgbClr val="444444"/>
+                </a:solidFill>
+                <a:latin typeface="Nanum Gothic Thin"/>
+                <a:ea typeface="Batang" panose="02030600000101010101" pitchFamily="18" charset="-127"/>
+              </a:rPr>
+              <a:t>	</a:t>
+            </a:r>
+            <a:r>
+              <a:rPr lang="ko-KR" altLang="en-US" sz="3200" b="1" spc="-50" dirty="0">
+                <a:solidFill>
+                  <a:schemeClr val="bg1"/>
+                </a:solidFill>
+                <a:latin typeface="Batang" panose="02030600000101010101" pitchFamily="18" charset="-127"/>
+                <a:ea typeface="Batang" panose="02030600000101010101" pitchFamily="18" charset="-127"/>
+              </a:rPr>
+              <a:t>저희는 가경자 최양업 신부의 시복 시성의 은총을 빌며 그의 전구에 힘입어 브로큰베이 한인천주교회를 위하여 기도드리오니 들어주소서</a:t>
+            </a:r>
+            <a:r>
+              <a:rPr lang="en-US" altLang="ko-KR" sz="3200" b="1" spc="-50" dirty="0">
+                <a:solidFill>
+                  <a:schemeClr val="bg1"/>
+                </a:solidFill>
+                <a:latin typeface="Batang" panose="02030600000101010101" pitchFamily="18" charset="-127"/>
+                <a:ea typeface="Batang" panose="02030600000101010101" pitchFamily="18" charset="-127"/>
+              </a:rPr>
+              <a:t>. </a:t>
+            </a:r>
+            <a:r>
+              <a:rPr lang="ko-KR" altLang="en-US" sz="3200" b="1" spc="-50" dirty="0">
+                <a:solidFill>
+                  <a:schemeClr val="bg1"/>
+                </a:solidFill>
+                <a:latin typeface="Batang" panose="02030600000101010101" pitchFamily="18" charset="-127"/>
+                <a:ea typeface="Batang" panose="02030600000101010101" pitchFamily="18" charset="-127"/>
+              </a:rPr>
+              <a:t>우리 주 그리스도를 통하여 비나이다</a:t>
+            </a:r>
+            <a:r>
+              <a:rPr lang="en-US" altLang="ko-KR" sz="3200" b="1" spc="-50" dirty="0">
+                <a:solidFill>
+                  <a:schemeClr val="bg1"/>
+                </a:solidFill>
+                <a:latin typeface="Batang" panose="02030600000101010101" pitchFamily="18" charset="-127"/>
+                <a:ea typeface="Batang" panose="02030600000101010101" pitchFamily="18" charset="-127"/>
+              </a:rPr>
+              <a:t>.</a:t>
+            </a:r>
+            <a:r>
+              <a:rPr lang="en-US" altLang="ko-KR" sz="3200" b="1" dirty="0">
+                <a:solidFill>
+                  <a:schemeClr val="bg1"/>
+                </a:solidFill>
+                <a:latin typeface="Batang" panose="02030600000101010101" pitchFamily="18" charset="-127"/>
+                <a:ea typeface="Batang" panose="02030600000101010101" pitchFamily="18" charset="-127"/>
+              </a:rPr>
+              <a:t>     </a:t>
+            </a:r>
+            <a:endParaRPr lang="en-US" altLang="ko-KR" sz="3200" b="1" i="0" dirty="0">
+              <a:solidFill>
+                <a:schemeClr val="bg1"/>
+              </a:solidFill>
+              <a:effectLst/>
+              <a:latin typeface="Batang" panose="02030600000101010101" pitchFamily="18" charset="-127"/>
+              <a:ea typeface="Batang" panose="02030600000101010101" pitchFamily="18" charset="-127"/>
+            </a:endParaRPr>
+          </a:p>
+          <a:p>
+            <a:pPr marL="625475" indent="-625475">
+              <a:spcAft>
+                <a:spcPts val="1200"/>
+              </a:spcAft>
+            </a:pPr>
+            <a:r>
+              <a:rPr lang="ko-KR" altLang="en-US" sz="3500" b="1" dirty="0">
+                <a:solidFill>
+                  <a:schemeClr val="bg1"/>
+                </a:solidFill>
+                <a:latin typeface="바탕" panose="02030600000101010101" pitchFamily="18" charset="-127"/>
+                <a:ea typeface="바탕" panose="02030600000101010101" pitchFamily="18" charset="-127"/>
+              </a:rPr>
+              <a:t>◎</a:t>
+            </a:r>
+            <a:r>
+              <a:rPr lang="en-US" altLang="ko-KR" sz="3500" b="1" dirty="0">
+                <a:solidFill>
+                  <a:schemeClr val="bg1"/>
+                </a:solidFill>
+                <a:latin typeface="바탕" panose="02030600000101010101" pitchFamily="18" charset="-127"/>
+                <a:ea typeface="바탕" panose="02030600000101010101" pitchFamily="18" charset="-127"/>
+              </a:rPr>
+              <a:t>		</a:t>
+            </a:r>
+            <a:r>
+              <a:rPr lang="ko-KR" altLang="en-US" sz="3500" b="1" dirty="0">
+                <a:solidFill>
+                  <a:schemeClr val="bg1"/>
+                </a:solidFill>
+                <a:latin typeface="바탕" panose="02030600000101010101" pitchFamily="18" charset="-127"/>
+                <a:ea typeface="바탕" panose="02030600000101010101" pitchFamily="18" charset="-127"/>
+              </a:rPr>
+              <a:t>아 멘</a:t>
+            </a:r>
+            <a:r>
+              <a:rPr lang="en-US" altLang="ko-KR" sz="3500" b="1" dirty="0">
+                <a:solidFill>
+                  <a:schemeClr val="bg1"/>
+                </a:solidFill>
+                <a:latin typeface="바탕" panose="02030600000101010101" pitchFamily="18" charset="-127"/>
+                <a:ea typeface="바탕" panose="02030600000101010101" pitchFamily="18" charset="-127"/>
+              </a:rPr>
+              <a:t>.</a:t>
+            </a:r>
+          </a:p>
+        </p:txBody>
+      </p:sp>
+      <p:sp>
+        <p:nvSpPr>
+          <p:cNvPr id="4" name="TextBox 3">
+            <a:extLst>
+              <a:ext uri="{FF2B5EF4-FFF2-40B4-BE49-F238E27FC236}">
+                <a16:creationId xmlns:a16="http://schemas.microsoft.com/office/drawing/2014/main" id="{3C196F71-023D-4BE4-8EE4-DF4BF5614C97}"/>
+              </a:ext>
+            </a:extLst>
+          </p:cNvPr>
+          <p:cNvSpPr txBox="1"/>
+          <p:nvPr/>
+        </p:nvSpPr>
+        <p:spPr>
+          <a:xfrm>
+            <a:off x="6228184" y="4825685"/>
+            <a:ext cx="2808312" cy="215444"/>
+          </a:xfrm>
+          <a:prstGeom prst="rect">
+            <a:avLst/>
+          </a:prstGeom>
+          <a:noFill/>
+        </p:spPr>
+        <p:txBody>
+          <a:bodyPr wrap="square" lIns="0" tIns="0" rIns="0" bIns="0">
+            <a:spAutoFit/>
+          </a:bodyPr>
+          <a:lstStyle/>
+          <a:p>
+            <a:pPr algn="ctr"/>
+            <a:r>
+              <a:rPr lang="ko-KR" altLang="en-US" spc="-200" dirty="0">
+                <a:solidFill>
+                  <a:schemeClr val="bg1">
+                    <a:lumMod val="50000"/>
+                  </a:schemeClr>
+                </a:solidFill>
+                <a:latin typeface="궁서" panose="02030600000101010101" pitchFamily="18" charset="-127"/>
+                <a:ea typeface="궁서" panose="02030600000101010101" pitchFamily="18" charset="-127"/>
+              </a:rPr>
+              <a:t>가톨릭 기도서 © 한국천주교중앙협의회</a:t>
+            </a:r>
+          </a:p>
+        </p:txBody>
+      </p:sp>
+    </p:spTree>
+  </p:cSld>
+  <p:clrMapOvr>
+    <a:masterClrMapping/>
+  </p:clrMapOvr>
+</p:sld>
+</file>
+
 <file path=ppt/slides/slide3.xml><?xml version="1.0" encoding="utf-8"?>
 <p:sld xmlns:a="http://schemas.openxmlformats.org/drawingml/2006/main" xmlns:r="http://schemas.openxmlformats.org/officeDocument/2006/relationships" xmlns:p="http://schemas.openxmlformats.org/presentationml/2006/main" showMasterSp="0">
   <p:cSld>
@@ -24246,6 +24147,328 @@
 </p:sld>
 </file>
 
+<file path=ppt/slides/slide30.xml><?xml version="1.0" encoding="utf-8"?>
+<p:sld xmlns:a="http://schemas.openxmlformats.org/drawingml/2006/main" xmlns:p="http://schemas.openxmlformats.org/presentationml/2006/main" xmlns:r="http://schemas.openxmlformats.org/officeDocument/2006/relationships">
+  <p:cSld>
+    <p:bg>
+      <p:bgPr>
+        <a:solidFill>
+          <a:schemeClr val="tx1"/>
+        </a:solidFill>
+        <a:effectLst/>
+      </p:bgPr>
+    </p:bg>
+    <p:spTree>
+      <p:nvGrpSpPr>
+        <p:cNvPr id="1" name=""/>
+        <p:cNvGrpSpPr/>
+        <p:nvPr/>
+      </p:nvGrpSpPr>
+      <p:grpSpPr/>
+      <p:sp>
+        <p:nvSpPr>
+          <p:cNvPr id="9" name="Rectangle 8"/>
+          <p:cNvSpPr/>
+          <p:nvPr/>
+        </p:nvSpPr>
+        <p:spPr>
+          <a:xfrm>
+            <a:off x="179512" y="537763"/>
+            <a:ext cx="8784976" cy="3701463"/>
+          </a:xfrm>
+          <a:prstGeom prst="rect">
+            <a:avLst/>
+          </a:prstGeom>
+        </p:spPr>
+        <p:txBody>
+          <a:bodyPr wrap="square">
+            <a:spAutoFit/>
+          </a:bodyPr>
+          <a:lstStyle/>
+          <a:p>
+            <a:pPr marL="717550" indent="-717550">
+              <a:lnSpc>
+                <a:spcPct val="125000"/>
+              </a:lnSpc>
+              <a:spcAft>
+                <a:spcPts val="1200"/>
+              </a:spcAft>
+            </a:pPr>
+            <a:r>
+              <a:rPr lang="ko-KR" altLang="en-US" sz="3000" b="1" dirty="0">
+                <a:solidFill>
+                  <a:schemeClr val="bg2">
+                    <a:lumMod val="90000"/>
+                  </a:schemeClr>
+                </a:solidFill>
+                <a:latin typeface="바탕" pitchFamily="18" charset="-127"/>
+                <a:ea typeface="바탕" pitchFamily="18" charset="-127"/>
+              </a:rPr>
+              <a:t>○</a:t>
+            </a:r>
+            <a:r>
+              <a:rPr lang="en-US" altLang="ko-KR" sz="3000" b="1" dirty="0">
+                <a:solidFill>
+                  <a:schemeClr val="bg2">
+                    <a:lumMod val="90000"/>
+                  </a:schemeClr>
+                </a:solidFill>
+                <a:latin typeface="바탕" pitchFamily="18" charset="-127"/>
+                <a:ea typeface="바탕" pitchFamily="18" charset="-127"/>
+              </a:rPr>
+              <a:t>  	</a:t>
+            </a:r>
+            <a:r>
+              <a:rPr lang="ko-KR" altLang="en-US" sz="3200" b="1" dirty="0">
+                <a:solidFill>
+                  <a:srgbClr val="DDD9C3"/>
+                </a:solidFill>
+                <a:latin typeface="Batang" panose="02030600000101010101" pitchFamily="18" charset="-127"/>
+                <a:ea typeface="Batang" panose="02030600000101010101" pitchFamily="18" charset="-127"/>
+              </a:rPr>
+              <a:t>자비로우신 하느님 아버지</a:t>
+            </a:r>
+            <a:r>
+              <a:rPr lang="en-US" altLang="ko-KR" sz="3200" b="1" dirty="0">
+                <a:solidFill>
+                  <a:srgbClr val="DDD9C3"/>
+                </a:solidFill>
+                <a:latin typeface="Batang" panose="02030600000101010101" pitchFamily="18" charset="-127"/>
+                <a:ea typeface="Batang" panose="02030600000101010101" pitchFamily="18" charset="-127"/>
+              </a:rPr>
+              <a:t>, </a:t>
+            </a:r>
+            <a:r>
+              <a:rPr lang="ko-KR" altLang="en-US" sz="3200" b="1" dirty="0">
+                <a:solidFill>
+                  <a:srgbClr val="DDD9C3"/>
+                </a:solidFill>
+                <a:latin typeface="Batang" panose="02030600000101010101" pitchFamily="18" charset="-127"/>
+                <a:ea typeface="Batang" panose="02030600000101010101" pitchFamily="18" charset="-127"/>
+              </a:rPr>
+              <a:t>간절히 청하오니 가경자 최양업 토마스 신부에게 시복 시성의 은혜를 허락하시어 그에게 주셨던 굳건한 믿음과 온전한 헌신의 정신을 본받아 오늘 저희도 한마음으로 복음을 살고 전하는 일꾼이 되게 하소서</a:t>
+            </a:r>
+            <a:r>
+              <a:rPr lang="en-US" altLang="ko-KR" sz="3200" b="1" dirty="0">
+                <a:solidFill>
+                  <a:srgbClr val="DDD9C3"/>
+                </a:solidFill>
+                <a:latin typeface="Batang" panose="02030600000101010101" pitchFamily="18" charset="-127"/>
+                <a:ea typeface="Batang" panose="02030600000101010101" pitchFamily="18" charset="-127"/>
+              </a:rPr>
+              <a:t>.</a:t>
+            </a:r>
+            <a:endParaRPr lang="en-US" altLang="ko-KR" sz="3200" b="1" dirty="0">
+              <a:solidFill>
+                <a:schemeClr val="bg1"/>
+              </a:solidFill>
+              <a:latin typeface="Batang" panose="02030600000101010101" pitchFamily="18" charset="-127"/>
+              <a:ea typeface="Batang" panose="02030600000101010101" pitchFamily="18" charset="-127"/>
+            </a:endParaRPr>
+          </a:p>
+        </p:txBody>
+      </p:sp>
+      <p:sp>
+        <p:nvSpPr>
+          <p:cNvPr id="4" name="TextBox 3">
+            <a:extLst>
+              <a:ext uri="{FF2B5EF4-FFF2-40B4-BE49-F238E27FC236}">
+                <a16:creationId xmlns:a16="http://schemas.microsoft.com/office/drawing/2014/main" id="{67C8B50A-87C0-41C7-83D4-96B95F8F1E2D}"/>
+              </a:ext>
+            </a:extLst>
+          </p:cNvPr>
+          <p:cNvSpPr txBox="1"/>
+          <p:nvPr/>
+        </p:nvSpPr>
+        <p:spPr>
+          <a:xfrm>
+            <a:off x="6228184" y="4825685"/>
+            <a:ext cx="2808312" cy="215444"/>
+          </a:xfrm>
+          <a:prstGeom prst="rect">
+            <a:avLst/>
+          </a:prstGeom>
+          <a:noFill/>
+        </p:spPr>
+        <p:txBody>
+          <a:bodyPr wrap="square" lIns="0" tIns="0" rIns="0" bIns="0">
+            <a:spAutoFit/>
+          </a:bodyPr>
+          <a:lstStyle/>
+          <a:p>
+            <a:pPr algn="ctr"/>
+            <a:r>
+              <a:rPr lang="ko-KR" altLang="en-US" spc="-200" dirty="0">
+                <a:solidFill>
+                  <a:schemeClr val="bg1">
+                    <a:lumMod val="50000"/>
+                  </a:schemeClr>
+                </a:solidFill>
+                <a:latin typeface="궁서" panose="02030600000101010101" pitchFamily="18" charset="-127"/>
+                <a:ea typeface="궁서" panose="02030600000101010101" pitchFamily="18" charset="-127"/>
+              </a:rPr>
+              <a:t>가톨릭 기도서 © 한국천주교중앙협의회</a:t>
+            </a:r>
+          </a:p>
+        </p:txBody>
+      </p:sp>
+    </p:spTree>
+  </p:cSld>
+  <p:clrMapOvr>
+    <a:masterClrMapping/>
+  </p:clrMapOvr>
+</p:sld>
+</file>
+
+<file path=ppt/slides/slide31.xml><?xml version="1.0" encoding="utf-8"?>
+<p:sld xmlns:a="http://schemas.openxmlformats.org/drawingml/2006/main" xmlns:p="http://schemas.openxmlformats.org/presentationml/2006/main" xmlns:r="http://schemas.openxmlformats.org/officeDocument/2006/relationships">
+  <p:cSld>
+    <p:bg>
+      <p:bgPr>
+        <a:solidFill>
+          <a:schemeClr val="tx1"/>
+        </a:solidFill>
+        <a:effectLst/>
+      </p:bgPr>
+    </p:bg>
+    <p:spTree>
+      <p:nvGrpSpPr>
+        <p:cNvPr id="1" name=""/>
+        <p:cNvGrpSpPr/>
+        <p:nvPr/>
+      </p:nvGrpSpPr>
+      <p:grpSpPr/>
+      <p:sp>
+        <p:nvSpPr>
+          <p:cNvPr id="9" name="Rectangle 8"/>
+          <p:cNvSpPr/>
+          <p:nvPr/>
+        </p:nvSpPr>
+        <p:spPr>
+          <a:xfrm>
+            <a:off x="78049" y="252036"/>
+            <a:ext cx="8991076" cy="4563237"/>
+          </a:xfrm>
+          <a:prstGeom prst="rect">
+            <a:avLst/>
+          </a:prstGeom>
+        </p:spPr>
+        <p:txBody>
+          <a:bodyPr wrap="square">
+            <a:spAutoFit/>
+          </a:bodyPr>
+          <a:lstStyle/>
+          <a:p>
+            <a:pPr marL="625475" indent="-625475">
+              <a:lnSpc>
+                <a:spcPct val="150000"/>
+              </a:lnSpc>
+              <a:spcAft>
+                <a:spcPts val="1200"/>
+              </a:spcAft>
+            </a:pPr>
+            <a:r>
+              <a:rPr lang="ko-KR" altLang="en-US" sz="3200" dirty="0">
+                <a:solidFill>
+                  <a:schemeClr val="bg1"/>
+                </a:solidFill>
+                <a:latin typeface="바탕" pitchFamily="18" charset="-127"/>
+                <a:ea typeface="바탕" pitchFamily="18" charset="-127"/>
+              </a:rPr>
+              <a:t>●</a:t>
+            </a:r>
+            <a:r>
+              <a:rPr lang="en-US" altLang="ko-KR" sz="3200" b="1" dirty="0">
+                <a:solidFill>
+                  <a:srgbClr val="DDD9C3"/>
+                </a:solidFill>
+                <a:latin typeface="Batang" panose="02030600000101010101" pitchFamily="18" charset="-127"/>
+                <a:ea typeface="Batang" panose="02030600000101010101" pitchFamily="18" charset="-127"/>
+              </a:rPr>
+              <a:t> 	</a:t>
+            </a:r>
+            <a:r>
+              <a:rPr lang="ko-KR" altLang="en-US" sz="3200" b="1" dirty="0">
+                <a:solidFill>
+                  <a:schemeClr val="bg1"/>
+                </a:solidFill>
+                <a:latin typeface="Batang" panose="02030600000101010101" pitchFamily="18" charset="-127"/>
+                <a:ea typeface="Batang" panose="02030600000101010101" pitchFamily="18" charset="-127"/>
+              </a:rPr>
+              <a:t>모든 교우들이 오로지 하느님 자비에 희망을 두고 박해를 피해 산골 깊이 숨어 신앙을 지켜야 했던 시대에 최양업 토마스 신부는 주님을 닮은 착한 목자로 목숨이 다할 때까지 쉼 없이 양들을 찾아 복음을 전하고 주님께서 이루신 구원의 은총을 전했나이다</a:t>
+            </a:r>
+            <a:r>
+              <a:rPr lang="en-AU" altLang="ko-KR" sz="3200" b="1" dirty="0">
+                <a:solidFill>
+                  <a:schemeClr val="bg1"/>
+                </a:solidFill>
+                <a:latin typeface="Batang" panose="02030600000101010101" pitchFamily="18" charset="-127"/>
+                <a:ea typeface="Batang" panose="02030600000101010101" pitchFamily="18" charset="-127"/>
+              </a:rPr>
+              <a:t>.</a:t>
+            </a:r>
+            <a:endParaRPr lang="en-US" altLang="ko-KR" sz="3200" b="1" dirty="0">
+              <a:solidFill>
+                <a:schemeClr val="bg1"/>
+              </a:solidFill>
+              <a:latin typeface="Batang" panose="02030600000101010101" pitchFamily="18" charset="-127"/>
+              <a:ea typeface="Batang" panose="02030600000101010101" pitchFamily="18" charset="-127"/>
+            </a:endParaRPr>
+          </a:p>
+        </p:txBody>
+      </p:sp>
+      <p:sp>
+        <p:nvSpPr>
+          <p:cNvPr id="5" name="TextBox 4">
+            <a:extLst>
+              <a:ext uri="{FF2B5EF4-FFF2-40B4-BE49-F238E27FC236}">
+                <a16:creationId xmlns:a16="http://schemas.microsoft.com/office/drawing/2014/main" id="{854A94FA-B5D4-48DC-994C-9FCB87C8A2E9}"/>
+              </a:ext>
+            </a:extLst>
+          </p:cNvPr>
+          <p:cNvSpPr txBox="1"/>
+          <p:nvPr/>
+        </p:nvSpPr>
+        <p:spPr>
+          <a:xfrm>
+            <a:off x="6228184" y="4825685"/>
+            <a:ext cx="2808312" cy="215444"/>
+          </a:xfrm>
+          <a:prstGeom prst="rect">
+            <a:avLst/>
+          </a:prstGeom>
+          <a:noFill/>
+        </p:spPr>
+        <p:txBody>
+          <a:bodyPr wrap="square" lIns="0" tIns="0" rIns="0" bIns="0">
+            <a:spAutoFit/>
+          </a:bodyPr>
+          <a:lstStyle/>
+          <a:p>
+            <a:pPr algn="ctr"/>
+            <a:r>
+              <a:rPr lang="ko-KR" altLang="en-US" spc="-200" dirty="0">
+                <a:solidFill>
+                  <a:schemeClr val="bg1">
+                    <a:lumMod val="50000"/>
+                  </a:schemeClr>
+                </a:solidFill>
+                <a:latin typeface="궁서" panose="02030600000101010101" pitchFamily="18" charset="-127"/>
+                <a:ea typeface="궁서" panose="02030600000101010101" pitchFamily="18" charset="-127"/>
+              </a:rPr>
+              <a:t>가톨릭 기도서 © 한국천주교중앙협의회</a:t>
+            </a:r>
+          </a:p>
+        </p:txBody>
+      </p:sp>
+    </p:spTree>
+  </p:cSld>
+  <p:clrMapOvr>
+    <a:masterClrMapping/>
+  </p:clrMapOvr>
+</p:sld>
+</file>
+
 <file path=ppt/slides/slide32.xml><?xml version="1.0" encoding="utf-8"?>
 <p:sld xmlns:a="http://schemas.openxmlformats.org/drawingml/2006/main" xmlns:p="http://schemas.openxmlformats.org/presentationml/2006/main" xmlns:r="http://schemas.openxmlformats.org/officeDocument/2006/relationships">
   <p:cSld>
@@ -24381,7 +24604,7 @@
                 <a:latin typeface="바탕" panose="02030600000101010101" pitchFamily="18" charset="-127"/>
                 <a:ea typeface="바탕" panose="02030600000101010101" pitchFamily="18" charset="-127"/>
               </a:rPr>
-              <a:t>“제가 주님을 뵈었습니다.” 하면서, 예수님께서 자기에게</a:t>
+              <a:t>자기에게</a:t>
             </a:r>
             <a:r>
               <a:rPr lang="en-US" altLang="ko-KR" sz="3200" b="1" dirty="0" smtClean="0">
@@ -24420,7 +24643,7 @@
         </p:nvSpPr>
         <p:spPr>
           <a:xfrm>
-            <a:off x="179512" y="2327642"/>
+            <a:off x="179512" y="1758599"/>
             <a:ext cx="7272808" cy="3619444"/>
           </a:xfrm>
           <a:prstGeom prst="rect">
@@ -24818,26 +25041,6 @@
                 <a:latin typeface="바탕" panose="02030600000101010101" pitchFamily="18" charset="-127"/>
                 <a:ea typeface="바탕" panose="02030600000101010101" pitchFamily="18" charset="-127"/>
               </a:rPr>
-              <a:t>하고</a:t>
-            </a:r>
-            <a:r>
-              <a:rPr lang="en-US" altLang="ko-KR" sz="3200" b="1" dirty="0" smtClean="0">
-                <a:solidFill>
-                  <a:schemeClr val="bg1"/>
-                </a:solidFill>
-                <a:latin typeface="바탕" panose="02030600000101010101" pitchFamily="18" charset="-127"/>
-                <a:ea typeface="바탕" panose="02030600000101010101" pitchFamily="18" charset="-127"/>
-              </a:rPr>
-              <a:t> </a:t>
-            </a:r>
-            <a:r>
-              <a:rPr lang="en-US" altLang="ko-KR" sz="3200" b="1" dirty="0" smtClean="0">
-                <a:solidFill>
-                  <a:schemeClr val="bg1"/>
-                </a:solidFill>
-                <a:latin typeface="바탕" panose="02030600000101010101" pitchFamily="18" charset="-127"/>
-                <a:ea typeface="바탕" panose="02030600000101010101" pitchFamily="18" charset="-127"/>
-              </a:rPr>
               <a:t>불렀다. 이는 ‘스승님!’이라는 뜻이다.</a:t>
             </a:r>
           </a:p>
@@ -24998,7 +25201,27 @@
                 <a:latin typeface="바탕" panose="02030600000101010101" pitchFamily="18" charset="-127"/>
                 <a:ea typeface="바탕" panose="02030600000101010101" pitchFamily="18" charset="-127"/>
               </a:rPr>
-              <a:t>마리아 막달레나는 제자들에게 가서</a:t>
+              <a:t>마리아 막달레나는 제자들에게 가서 “제가</a:t>
+            </a:r>
+            <a:r>
+              <a:rPr lang="en-US" altLang="ko-KR" sz="3200" b="1" dirty="0" smtClean="0">
+                <a:solidFill>
+                  <a:schemeClr val="bg1"/>
+                </a:solidFill>
+                <a:latin typeface="바탕" panose="02030600000101010101" pitchFamily="18" charset="-127"/>
+                <a:ea typeface="바탕" panose="02030600000101010101" pitchFamily="18" charset="-127"/>
+              </a:rPr>
+              <a:t> </a:t>
+            </a:r>
+            <a:r>
+              <a:rPr lang="en-US" altLang="ko-KR" sz="3200" b="1" dirty="0" smtClean="0">
+                <a:solidFill>
+                  <a:schemeClr val="bg1"/>
+                </a:solidFill>
+                <a:latin typeface="바탕" panose="02030600000101010101" pitchFamily="18" charset="-127"/>
+                <a:ea typeface="바탕" panose="02030600000101010101" pitchFamily="18" charset="-127"/>
+              </a:rPr>
+              <a:t>주님을 뵈었습니다.” 하면서, 예수님께서</a:t>
             </a:r>
           </a:p>
         </p:txBody>
@@ -25306,7 +25529,27 @@
                 <a:latin typeface="바탕" panose="02030600000101010101" pitchFamily="18" charset="-127"/>
                 <a:ea typeface="바탕" panose="02030600000101010101" pitchFamily="18" charset="-127"/>
               </a:rPr>
-              <a:t>예수님께서 “마리아야!” 하고 부르셨다. 마리아는 돌아서서 히브리 말로 “라뿌니!”</a:t>
+              <a:t>예수님께서 “마리아야!” 하고 부르셨다.</a:t>
+            </a:r>
+            <a:r>
+              <a:rPr lang="en-US" altLang="ko-KR" sz="3200" b="1" dirty="0" smtClean="0">
+                <a:solidFill>
+                  <a:schemeClr val="bg1"/>
+                </a:solidFill>
+                <a:latin typeface="바탕" panose="02030600000101010101" pitchFamily="18" charset="-127"/>
+                <a:ea typeface="바탕" panose="02030600000101010101" pitchFamily="18" charset="-127"/>
+              </a:rPr>
+              <a:t> </a:t>
+            </a:r>
+            <a:r>
+              <a:rPr lang="en-US" altLang="ko-KR" sz="3200" b="1" dirty="0" smtClean="0">
+                <a:solidFill>
+                  <a:schemeClr val="bg1"/>
+                </a:solidFill>
+                <a:latin typeface="바탕" panose="02030600000101010101" pitchFamily="18" charset="-127"/>
+                <a:ea typeface="바탕" panose="02030600000101010101" pitchFamily="18" charset="-127"/>
+              </a:rPr>
+              <a:t>마리아는 돌아서서 히브리 말로 “라뿌니!” 하고</a:t>
             </a:r>
           </a:p>
         </p:txBody>
@@ -26844,6 +27087,255 @@
 </p:sld>
 </file>
 
+<file path=ppt/slides/slide41.xml><?xml version="1.0" encoding="utf-8"?>
+<p:sld xmlns:a="http://schemas.openxmlformats.org/drawingml/2006/main" xmlns:p="http://schemas.openxmlformats.org/presentationml/2006/main" xmlns:r="http://schemas.openxmlformats.org/officeDocument/2006/relationships">
+  <p:cSld>
+    <p:bg>
+      <p:bgPr>
+        <a:solidFill>
+          <a:schemeClr val="tx1"/>
+        </a:solidFill>
+        <a:effectLst/>
+      </p:bgPr>
+    </p:bg>
+    <p:spTree>
+      <p:nvGrpSpPr>
+        <p:cNvPr id="1" name=""/>
+        <p:cNvGrpSpPr/>
+        <p:nvPr/>
+      </p:nvGrpSpPr>
+      <p:grpSpPr/>
+      <p:sp>
+        <p:nvSpPr>
+          <p:cNvPr id="9" name="Rectangle 8"/>
+          <p:cNvSpPr/>
+          <p:nvPr/>
+        </p:nvSpPr>
+        <p:spPr>
+          <a:xfrm>
+            <a:off x="209273" y="1079191"/>
+            <a:ext cx="8856984" cy="3867662"/>
+          </a:xfrm>
+          <a:prstGeom prst="rect">
+            <a:avLst/>
+          </a:prstGeom>
+        </p:spPr>
+        <p:txBody>
+          <a:bodyPr wrap="square">
+            <a:spAutoFit/>
+          </a:bodyPr>
+          <a:lstStyle/>
+          <a:p>
+            <a:pPr marL="625475" indent="-625475">
+              <a:lnSpc>
+                <a:spcPct val="150000"/>
+              </a:lnSpc>
+              <a:spcAft>
+                <a:spcPts val="1200"/>
+              </a:spcAft>
+            </a:pPr>
+            <a:r>
+              <a:rPr lang="ko-KR" altLang="en-US" sz="3000" b="1" dirty="0">
+                <a:solidFill>
+                  <a:schemeClr val="bg2">
+                    <a:lumMod val="90000"/>
+                  </a:schemeClr>
+                </a:solidFill>
+                <a:latin typeface="바탕" pitchFamily="18" charset="-127"/>
+                <a:ea typeface="바탕" pitchFamily="18" charset="-127"/>
+              </a:rPr>
+              <a:t>○</a:t>
+            </a:r>
+            <a:r>
+              <a:rPr lang="en-US" altLang="ko-KR" sz="3000" b="1" dirty="0">
+                <a:solidFill>
+                  <a:schemeClr val="bg2">
+                    <a:lumMod val="90000"/>
+                  </a:schemeClr>
+                </a:solidFill>
+                <a:latin typeface="바탕" pitchFamily="18" charset="-127"/>
+                <a:ea typeface="바탕" pitchFamily="18" charset="-127"/>
+              </a:rPr>
+              <a:t>  </a:t>
+            </a:r>
+            <a:r>
+              <a:rPr lang="ko-KR" altLang="en-US" sz="3200" b="1" dirty="0">
+                <a:solidFill>
+                  <a:srgbClr val="DDD9C3"/>
+                </a:solidFill>
+                <a:latin typeface="Batang" panose="02030600000101010101" pitchFamily="18" charset="-127"/>
+                <a:ea typeface="Batang" panose="02030600000101010101" pitchFamily="18" charset="-127"/>
+              </a:rPr>
+              <a:t>지극히 좋으신 하느님</a:t>
+            </a:r>
+            <a:r>
+              <a:rPr lang="en-US" altLang="ko-KR" sz="3200" b="1" dirty="0">
+                <a:solidFill>
+                  <a:srgbClr val="DDD9C3"/>
+                </a:solidFill>
+                <a:latin typeface="Batang" panose="02030600000101010101" pitchFamily="18" charset="-127"/>
+                <a:ea typeface="Batang" panose="02030600000101010101" pitchFamily="18" charset="-127"/>
+              </a:rPr>
+              <a:t>, </a:t>
+            </a:r>
+          </a:p>
+          <a:p>
+            <a:pPr marL="625475" indent="-625475">
+              <a:lnSpc>
+                <a:spcPct val="150000"/>
+              </a:lnSpc>
+              <a:spcAft>
+                <a:spcPts val="1200"/>
+              </a:spcAft>
+            </a:pPr>
+            <a:r>
+              <a:rPr lang="en-US" altLang="ko-KR" sz="3200" b="1" dirty="0">
+                <a:solidFill>
+                  <a:srgbClr val="DDD9C3"/>
+                </a:solidFill>
+                <a:latin typeface="Batang" panose="02030600000101010101" pitchFamily="18" charset="-127"/>
+                <a:ea typeface="Batang" panose="02030600000101010101" pitchFamily="18" charset="-127"/>
+              </a:rPr>
+              <a:t>	</a:t>
+            </a:r>
+            <a:r>
+              <a:rPr lang="ko-KR" altLang="en-US" sz="3200" b="1" dirty="0">
+                <a:solidFill>
+                  <a:srgbClr val="DDD9C3"/>
+                </a:solidFill>
+                <a:latin typeface="Batang" panose="02030600000101010101" pitchFamily="18" charset="-127"/>
+                <a:ea typeface="Batang" panose="02030600000101010101" pitchFamily="18" charset="-127"/>
+              </a:rPr>
+              <a:t>최양업 토마스 신부를 박해로 고통받는 교회의 든든한 목자로 세워 주셨음에 감사드리나이다</a:t>
+            </a:r>
+            <a:r>
+              <a:rPr lang="en-US" altLang="ko-KR" sz="3200" b="1" dirty="0">
+                <a:solidFill>
+                  <a:srgbClr val="DDD9C3"/>
+                </a:solidFill>
+                <a:latin typeface="Batang" panose="02030600000101010101" pitchFamily="18" charset="-127"/>
+                <a:ea typeface="Batang" panose="02030600000101010101" pitchFamily="18" charset="-127"/>
+              </a:rPr>
+              <a:t>.</a:t>
+            </a:r>
+          </a:p>
+          <a:p>
+            <a:pPr marL="625475" indent="-625475">
+              <a:lnSpc>
+                <a:spcPct val="120000"/>
+              </a:lnSpc>
+              <a:spcAft>
+                <a:spcPts val="1200"/>
+              </a:spcAft>
+            </a:pPr>
+            <a:endParaRPr lang="en-US" altLang="ko-KR" sz="3200" b="1" i="0" dirty="0">
+              <a:solidFill>
+                <a:srgbClr val="DDD9C3"/>
+              </a:solidFill>
+              <a:effectLst/>
+              <a:latin typeface="Batang" panose="02030600000101010101" pitchFamily="18" charset="-127"/>
+              <a:ea typeface="Batang" panose="02030600000101010101" pitchFamily="18" charset="-127"/>
+            </a:endParaRPr>
+          </a:p>
+        </p:txBody>
+      </p:sp>
+      <p:sp>
+        <p:nvSpPr>
+          <p:cNvPr id="3" name="object 3"/>
+          <p:cNvSpPr txBox="1">
+            <a:spLocks/>
+          </p:cNvSpPr>
+          <p:nvPr/>
+        </p:nvSpPr>
+        <p:spPr>
+          <a:xfrm>
+            <a:off x="827584" y="196647"/>
+            <a:ext cx="7272808" cy="430887"/>
+          </a:xfrm>
+          <a:prstGeom prst="rect">
+            <a:avLst/>
+          </a:prstGeom>
+        </p:spPr>
+        <p:txBody>
+          <a:bodyPr vert="horz" wrap="square" lIns="0" tIns="0" rIns="0" bIns="0" rtlCol="0">
+            <a:spAutoFit/>
+          </a:bodyPr>
+          <a:lstStyle>
+            <a:lvl1pPr>
+              <a:defRPr>
+                <a:latin typeface="+mj-lt"/>
+                <a:ea typeface="+mj-ea"/>
+                <a:cs typeface="+mj-cs"/>
+              </a:defRPr>
+            </a:lvl1pPr>
+          </a:lstStyle>
+          <a:p>
+            <a:pPr marL="9938" defTabSz="914400"/>
+            <a:r>
+              <a:rPr lang="ko-KR" altLang="en-US" sz="2800" kern="0" dirty="0">
+                <a:solidFill>
+                  <a:srgbClr val="FFC000"/>
+                </a:solidFill>
+                <a:latin typeface="궁서" pitchFamily="18" charset="-127"/>
+                <a:ea typeface="궁서" pitchFamily="18" charset="-127"/>
+              </a:rPr>
+              <a:t>가경자 최양업 토마스 신부 시복 시성 기도문</a:t>
+            </a:r>
+          </a:p>
+        </p:txBody>
+      </p:sp>
+      <p:sp>
+        <p:nvSpPr>
+          <p:cNvPr id="5" name="TextBox 4">
+            <a:extLst>
+              <a:ext uri="{FF2B5EF4-FFF2-40B4-BE49-F238E27FC236}">
+                <a16:creationId xmlns:a16="http://schemas.microsoft.com/office/drawing/2014/main" id="{678DF541-2D9C-4FDB-BFB1-A59A4B9A1C8F}"/>
+              </a:ext>
+            </a:extLst>
+          </p:cNvPr>
+          <p:cNvSpPr txBox="1"/>
+          <p:nvPr/>
+        </p:nvSpPr>
+        <p:spPr>
+          <a:xfrm>
+            <a:off x="6228184" y="4825685"/>
+            <a:ext cx="2808312" cy="215444"/>
+          </a:xfrm>
+          <a:prstGeom prst="rect">
+            <a:avLst/>
+          </a:prstGeom>
+          <a:noFill/>
+        </p:spPr>
+        <p:txBody>
+          <a:bodyPr wrap="square" lIns="0" tIns="0" rIns="0" bIns="0">
+            <a:spAutoFit/>
+          </a:bodyPr>
+          <a:lstStyle/>
+          <a:p>
+            <a:pPr algn="ctr"/>
+            <a:r>
+              <a:rPr lang="ko-KR" altLang="en-US" spc="-200" dirty="0">
+                <a:solidFill>
+                  <a:schemeClr val="bg1">
+                    <a:lumMod val="50000"/>
+                  </a:schemeClr>
+                </a:solidFill>
+                <a:latin typeface="궁서" panose="02030600000101010101" pitchFamily="18" charset="-127"/>
+                <a:ea typeface="궁서" panose="02030600000101010101" pitchFamily="18" charset="-127"/>
+              </a:rPr>
+              <a:t>가톨릭 기도서 ©  한국천주교중앙협의회</a:t>
+            </a:r>
+          </a:p>
+        </p:txBody>
+      </p:sp>
+    </p:spTree>
+  </p:cSld>
+  <p:clrMapOvr>
+    <a:masterClrMapping/>
+  </p:clrMapOvr>
+</p:sld>
+</file>
+
 <file path=ppt/slides/slide42.xml><?xml version="1.0" encoding="utf-8"?>
 <p:sld xmlns:a="http://schemas.openxmlformats.org/drawingml/2006/main" xmlns:r="http://schemas.openxmlformats.org/officeDocument/2006/relationships" xmlns:p="http://schemas.openxmlformats.org/presentationml/2006/main">
   <p:cSld>
@@ -28705,7 +29197,7 @@
                 <a:latin typeface="바탕" pitchFamily="18" charset="-127"/>
                 <a:ea typeface="바탕" pitchFamily="18" charset="-127"/>
               </a:rPr>
-              <a:t>216</a:t>
+              <a:t>210</a:t>
             </a:r>
             <a:endParaRPr lang="en-US" altLang="ko-KR" sz="5200" b="1" spc="1500" dirty="0">
               <a:solidFill>
@@ -30233,7 +30725,7 @@
                 <a:latin typeface="바탕" pitchFamily="18" charset="-127"/>
                 <a:ea typeface="바탕" pitchFamily="18" charset="-127"/>
               </a:rPr>
-              <a:t>163</a:t>
+              <a:t>166</a:t>
             </a:r>
             <a:endParaRPr lang="ko-KR" altLang="en-US" sz="5200" b="1" spc="1500" dirty="0">
               <a:solidFill>
@@ -30751,7 +31243,7 @@
                 <a:latin typeface="바탕" pitchFamily="18" charset="-127"/>
                 <a:ea typeface="바탕" pitchFamily="18" charset="-127"/>
               </a:rPr>
-              <a:t>19</a:t>
+              <a:t>61</a:t>
             </a:r>
             <a:endParaRPr lang="en-US" altLang="ko-KR" sz="4800" b="1" spc="1500" dirty="0">
               <a:latin typeface="바탕" pitchFamily="18" charset="-127"/>
@@ -30801,849 +31293,6 @@
     <p:extLst>
       <p:ext uri="{BB962C8B-B14F-4D97-AF65-F5344CB8AC3E}">
         <p14:creationId xmlns="" xmlns:p14="http://schemas.microsoft.com/office/powerpoint/2010/main" val="1875219009"/>
-      </p:ext>
-    </p:extLst>
-  </p:cSld>
-  <p:clrMapOvr>
-    <a:masterClrMapping/>
-  </p:clrMapOvr>
-  <p:timing>
-    <p:tnLst>
-      <p:par>
-        <p:cTn id="1" dur="indefinite" restart="never" nodeType="tmRoot"/>
-      </p:par>
-    </p:tnLst>
-  </p:timing>
-</p:sld>
-</file>
-
-<file path=ppt/slides/slide62.xml><?xml version="1.0" encoding="utf-8"?>
-<p:sld xmlns:a="http://schemas.openxmlformats.org/drawingml/2006/main" xmlns:r="http://schemas.openxmlformats.org/officeDocument/2006/relationships" xmlns:p="http://schemas.openxmlformats.org/presentationml/2006/main" showMasterSp="0">
-  <p:cSld>
-    <p:spTree>
-      <p:nvGrpSpPr>
-        <p:cNvPr id="1" name=""/>
-        <p:cNvGrpSpPr/>
-        <p:nvPr/>
-      </p:nvGrpSpPr>
-      <p:grpSpPr>
-        <a:xfrm>
-          <a:off x="0" y="0"/>
-          <a:ext cx="0" cy="0"/>
-          <a:chOff x="0" y="0"/>
-          <a:chExt cx="0" cy="0"/>
-        </a:xfrm>
-      </p:grpSpPr>
-      <p:sp>
-        <p:nvSpPr>
-          <p:cNvPr id="9" name="Rectangle 8"/>
-          <p:cNvSpPr/>
-          <p:nvPr/>
-        </p:nvSpPr>
-        <p:spPr>
-          <a:xfrm>
-            <a:off x="209273" y="1079191"/>
-            <a:ext cx="8856984" cy="3867662"/>
-          </a:xfrm>
-          <a:prstGeom prst="rect">
-            <a:avLst/>
-          </a:prstGeom>
-        </p:spPr>
-        <p:txBody>
-          <a:bodyPr wrap="square">
-            <a:spAutoFit/>
-          </a:bodyPr>
-          <a:lstStyle/>
-          <a:p>
-            <a:pPr marL="625475" indent="-625475">
-              <a:lnSpc>
-                <a:spcPct val="150000"/>
-              </a:lnSpc>
-              <a:spcAft>
-                <a:spcPts val="1200"/>
-              </a:spcAft>
-            </a:pPr>
-            <a:r>
-              <a:rPr lang="ko-KR" altLang="en-US" sz="3000" b="1" dirty="0">
-                <a:solidFill>
-                  <a:srgbClr val="EEECE1">
-                    <a:lumMod val="90000"/>
-                  </a:srgbClr>
-                </a:solidFill>
-                <a:latin typeface="바탕" pitchFamily="18" charset="-127"/>
-                <a:ea typeface="바탕" pitchFamily="18" charset="-127"/>
-              </a:rPr>
-              <a:t>○</a:t>
-            </a:r>
-            <a:r>
-              <a:rPr lang="en-US" altLang="ko-KR" sz="3000" b="1" dirty="0">
-                <a:solidFill>
-                  <a:srgbClr val="EEECE1">
-                    <a:lumMod val="90000"/>
-                  </a:srgbClr>
-                </a:solidFill>
-                <a:latin typeface="바탕" pitchFamily="18" charset="-127"/>
-                <a:ea typeface="바탕" pitchFamily="18" charset="-127"/>
-              </a:rPr>
-              <a:t>  </a:t>
-            </a:r>
-            <a:r>
-              <a:rPr lang="ko-KR" altLang="en-US" sz="3200" b="1" dirty="0">
-                <a:solidFill>
-                  <a:srgbClr val="DDD9C3"/>
-                </a:solidFill>
-                <a:latin typeface="Batang" panose="02030600000101010101" pitchFamily="18" charset="-127"/>
-                <a:ea typeface="Batang" panose="02030600000101010101" pitchFamily="18" charset="-127"/>
-              </a:rPr>
-              <a:t>지극히 좋으신 하느님</a:t>
-            </a:r>
-            <a:r>
-              <a:rPr lang="en-US" altLang="ko-KR" sz="3200" b="1" dirty="0">
-                <a:solidFill>
-                  <a:srgbClr val="DDD9C3"/>
-                </a:solidFill>
-                <a:latin typeface="Batang" panose="02030600000101010101" pitchFamily="18" charset="-127"/>
-                <a:ea typeface="Batang" panose="02030600000101010101" pitchFamily="18" charset="-127"/>
-              </a:rPr>
-              <a:t>, </a:t>
-            </a:r>
-          </a:p>
-          <a:p>
-            <a:pPr marL="625475" indent="-625475">
-              <a:lnSpc>
-                <a:spcPct val="150000"/>
-              </a:lnSpc>
-              <a:spcAft>
-                <a:spcPts val="1200"/>
-              </a:spcAft>
-            </a:pPr>
-            <a:r>
-              <a:rPr lang="en-US" altLang="ko-KR" sz="3200" b="1" dirty="0">
-                <a:solidFill>
-                  <a:srgbClr val="DDD9C3"/>
-                </a:solidFill>
-                <a:latin typeface="Batang" panose="02030600000101010101" pitchFamily="18" charset="-127"/>
-                <a:ea typeface="Batang" panose="02030600000101010101" pitchFamily="18" charset="-127"/>
-              </a:rPr>
-              <a:t>	</a:t>
-            </a:r>
-            <a:r>
-              <a:rPr lang="ko-KR" altLang="en-US" sz="3200" b="1" dirty="0">
-                <a:solidFill>
-                  <a:srgbClr val="DDD9C3"/>
-                </a:solidFill>
-                <a:latin typeface="Batang" panose="02030600000101010101" pitchFamily="18" charset="-127"/>
-                <a:ea typeface="Batang" panose="02030600000101010101" pitchFamily="18" charset="-127"/>
-              </a:rPr>
-              <a:t>최양업 토마스 신부를 박해로 고통받는 교회의 든든한 목자로 세워 주셨음에 감사드리나이다</a:t>
-            </a:r>
-            <a:r>
-              <a:rPr lang="en-US" altLang="ko-KR" sz="3200" b="1" dirty="0">
-                <a:solidFill>
-                  <a:srgbClr val="DDD9C3"/>
-                </a:solidFill>
-                <a:latin typeface="Batang" panose="02030600000101010101" pitchFamily="18" charset="-127"/>
-                <a:ea typeface="Batang" panose="02030600000101010101" pitchFamily="18" charset="-127"/>
-              </a:rPr>
-              <a:t>.</a:t>
-            </a:r>
-          </a:p>
-          <a:p>
-            <a:pPr marL="625475" indent="-625475">
-              <a:lnSpc>
-                <a:spcPct val="120000"/>
-              </a:lnSpc>
-              <a:spcAft>
-                <a:spcPts val="1200"/>
-              </a:spcAft>
-            </a:pPr>
-            <a:endParaRPr lang="en-US" altLang="ko-KR" sz="3200" b="1" dirty="0">
-              <a:solidFill>
-                <a:srgbClr val="DDD9C3"/>
-              </a:solidFill>
-              <a:latin typeface="Batang" panose="02030600000101010101" pitchFamily="18" charset="-127"/>
-              <a:ea typeface="Batang" panose="02030600000101010101" pitchFamily="18" charset="-127"/>
-            </a:endParaRPr>
-          </a:p>
-        </p:txBody>
-      </p:sp>
-      <p:sp>
-        <p:nvSpPr>
-          <p:cNvPr id="3" name="object 3"/>
-          <p:cNvSpPr txBox="1">
-            <a:spLocks/>
-          </p:cNvSpPr>
-          <p:nvPr/>
-        </p:nvSpPr>
-        <p:spPr>
-          <a:xfrm>
-            <a:off x="827584" y="196647"/>
-            <a:ext cx="7272808" cy="430887"/>
-          </a:xfrm>
-          <a:prstGeom prst="rect">
-            <a:avLst/>
-          </a:prstGeom>
-        </p:spPr>
-        <p:txBody>
-          <a:bodyPr vert="horz" wrap="square" lIns="0" tIns="0" rIns="0" bIns="0" rtlCol="0">
-            <a:spAutoFit/>
-          </a:bodyPr>
-          <a:lstStyle>
-            <a:lvl1pPr>
-              <a:defRPr>
-                <a:latin typeface="+mj-lt"/>
-                <a:ea typeface="+mj-ea"/>
-                <a:cs typeface="+mj-cs"/>
-              </a:defRPr>
-            </a:lvl1pPr>
-          </a:lstStyle>
-          <a:p>
-            <a:pPr marL="9938" defTabSz="914400"/>
-            <a:r>
-              <a:rPr lang="ko-KR" altLang="en-US" sz="2800" kern="0" dirty="0">
-                <a:solidFill>
-                  <a:srgbClr val="FFC000"/>
-                </a:solidFill>
-                <a:latin typeface="궁서" pitchFamily="18" charset="-127"/>
-                <a:ea typeface="궁서" pitchFamily="18" charset="-127"/>
-              </a:rPr>
-              <a:t>가경자 최양업 토마스 신부 시복 시성 기도문</a:t>
-            </a:r>
-          </a:p>
-        </p:txBody>
-      </p:sp>
-      <p:sp>
-        <p:nvSpPr>
-          <p:cNvPr id="5" name="TextBox 4">
-            <a:extLst>
-              <a:ext uri="{FF2B5EF4-FFF2-40B4-BE49-F238E27FC236}">
-                <a16:creationId xmlns:a16="http://schemas.microsoft.com/office/drawing/2014/main" xmlns="" id="{678DF541-2D9C-4FDB-BFB1-A59A4B9A1C8F}"/>
-              </a:ext>
-            </a:extLst>
-          </p:cNvPr>
-          <p:cNvSpPr txBox="1"/>
-          <p:nvPr/>
-        </p:nvSpPr>
-        <p:spPr>
-          <a:xfrm>
-            <a:off x="6228184" y="4825685"/>
-            <a:ext cx="2808312" cy="215444"/>
-          </a:xfrm>
-          <a:prstGeom prst="rect">
-            <a:avLst/>
-          </a:prstGeom>
-          <a:noFill/>
-        </p:spPr>
-        <p:txBody>
-          <a:bodyPr wrap="square" lIns="0" tIns="0" rIns="0" bIns="0">
-            <a:spAutoFit/>
-          </a:bodyPr>
-          <a:lstStyle/>
-          <a:p>
-            <a:pPr algn="ctr"/>
-            <a:r>
-              <a:rPr lang="ko-KR" altLang="en-US" spc="-200" dirty="0">
-                <a:solidFill>
-                  <a:prstClr val="white">
-                    <a:lumMod val="50000"/>
-                  </a:prstClr>
-                </a:solidFill>
-                <a:latin typeface="궁서" panose="02030600000101010101" pitchFamily="18" charset="-127"/>
-                <a:ea typeface="궁서" panose="02030600000101010101" pitchFamily="18" charset="-127"/>
-              </a:rPr>
-              <a:t>가톨릭 기도서 ©  한국천주교중앙협의회</a:t>
-            </a:r>
-          </a:p>
-        </p:txBody>
-      </p:sp>
-    </p:spTree>
-    <p:extLst>
-      <p:ext uri="{BB962C8B-B14F-4D97-AF65-F5344CB8AC3E}">
-        <p14:creationId xmlns:p14="http://schemas.microsoft.com/office/powerpoint/2010/main" xmlns="" val="2190241959"/>
-      </p:ext>
-    </p:extLst>
-  </p:cSld>
-  <p:clrMapOvr>
-    <a:masterClrMapping/>
-  </p:clrMapOvr>
-  <p:timing>
-    <p:tnLst>
-      <p:par>
-        <p:cTn id="1" dur="indefinite" restart="never" nodeType="tmRoot"/>
-      </p:par>
-    </p:tnLst>
-  </p:timing>
-</p:sld>
-</file>
-
-<file path=ppt/slides/slide63.xml><?xml version="1.0" encoding="utf-8"?>
-<p:sld xmlns:a="http://schemas.openxmlformats.org/drawingml/2006/main" xmlns:r="http://schemas.openxmlformats.org/officeDocument/2006/relationships" xmlns:p="http://schemas.openxmlformats.org/presentationml/2006/main" showMasterSp="0">
-  <p:cSld>
-    <p:spTree>
-      <p:nvGrpSpPr>
-        <p:cNvPr id="1" name=""/>
-        <p:cNvGrpSpPr/>
-        <p:nvPr/>
-      </p:nvGrpSpPr>
-      <p:grpSpPr>
-        <a:xfrm>
-          <a:off x="0" y="0"/>
-          <a:ext cx="0" cy="0"/>
-          <a:chOff x="0" y="0"/>
-          <a:chExt cx="0" cy="0"/>
-        </a:xfrm>
-      </p:grpSpPr>
-      <p:sp>
-        <p:nvSpPr>
-          <p:cNvPr id="9" name="Rectangle 8"/>
-          <p:cNvSpPr/>
-          <p:nvPr/>
-        </p:nvSpPr>
-        <p:spPr>
-          <a:xfrm>
-            <a:off x="78049" y="252036"/>
-            <a:ext cx="8991076" cy="4563237"/>
-          </a:xfrm>
-          <a:prstGeom prst="rect">
-            <a:avLst/>
-          </a:prstGeom>
-        </p:spPr>
-        <p:txBody>
-          <a:bodyPr wrap="square">
-            <a:spAutoFit/>
-          </a:bodyPr>
-          <a:lstStyle/>
-          <a:p>
-            <a:pPr marL="625475" indent="-625475">
-              <a:lnSpc>
-                <a:spcPct val="150000"/>
-              </a:lnSpc>
-              <a:spcAft>
-                <a:spcPts val="1200"/>
-              </a:spcAft>
-            </a:pPr>
-            <a:r>
-              <a:rPr lang="ko-KR" altLang="en-US" sz="3200" dirty="0">
-                <a:solidFill>
-                  <a:prstClr val="white"/>
-                </a:solidFill>
-                <a:latin typeface="바탕" pitchFamily="18" charset="-127"/>
-                <a:ea typeface="바탕" pitchFamily="18" charset="-127"/>
-              </a:rPr>
-              <a:t>●</a:t>
-            </a:r>
-            <a:r>
-              <a:rPr lang="en-US" altLang="ko-KR" sz="3200" b="1" dirty="0">
-                <a:solidFill>
-                  <a:srgbClr val="DDD9C3"/>
-                </a:solidFill>
-                <a:latin typeface="Batang" panose="02030600000101010101" pitchFamily="18" charset="-127"/>
-                <a:ea typeface="Batang" panose="02030600000101010101" pitchFamily="18" charset="-127"/>
-              </a:rPr>
-              <a:t> 	</a:t>
-            </a:r>
-            <a:r>
-              <a:rPr lang="ko-KR" altLang="en-US" sz="3200" b="1" dirty="0">
-                <a:solidFill>
-                  <a:prstClr val="white"/>
-                </a:solidFill>
-                <a:latin typeface="Batang" panose="02030600000101010101" pitchFamily="18" charset="-127"/>
-                <a:ea typeface="Batang" panose="02030600000101010101" pitchFamily="18" charset="-127"/>
-              </a:rPr>
-              <a:t>모든 교우들이 오로지 하느님 자비에 희망을 두고 박해를 피해 산골 깊이 숨어 신앙을 지켜야 했던 시대에 최양업 토마스 신부는 주님을 닮은 착한 목자로 목숨이 다할 때까지 쉼 없이 양들을 찾아 복음을 전하고 주님께서 이루신 구원의 은총을 전했나이다</a:t>
-            </a:r>
-            <a:r>
-              <a:rPr lang="en-AU" altLang="ko-KR" sz="3200" b="1" dirty="0">
-                <a:solidFill>
-                  <a:prstClr val="white"/>
-                </a:solidFill>
-                <a:latin typeface="Batang" panose="02030600000101010101" pitchFamily="18" charset="-127"/>
-                <a:ea typeface="Batang" panose="02030600000101010101" pitchFamily="18" charset="-127"/>
-              </a:rPr>
-              <a:t>.</a:t>
-            </a:r>
-            <a:endParaRPr lang="en-US" altLang="ko-KR" sz="3200" b="1" dirty="0">
-              <a:solidFill>
-                <a:prstClr val="white"/>
-              </a:solidFill>
-              <a:latin typeface="Batang" panose="02030600000101010101" pitchFamily="18" charset="-127"/>
-              <a:ea typeface="Batang" panose="02030600000101010101" pitchFamily="18" charset="-127"/>
-            </a:endParaRPr>
-          </a:p>
-        </p:txBody>
-      </p:sp>
-      <p:sp>
-        <p:nvSpPr>
-          <p:cNvPr id="5" name="TextBox 4">
-            <a:extLst>
-              <a:ext uri="{FF2B5EF4-FFF2-40B4-BE49-F238E27FC236}">
-                <a16:creationId xmlns:a16="http://schemas.microsoft.com/office/drawing/2014/main" xmlns="" id="{854A94FA-B5D4-48DC-994C-9FCB87C8A2E9}"/>
-              </a:ext>
-            </a:extLst>
-          </p:cNvPr>
-          <p:cNvSpPr txBox="1"/>
-          <p:nvPr/>
-        </p:nvSpPr>
-        <p:spPr>
-          <a:xfrm>
-            <a:off x="6228184" y="4825685"/>
-            <a:ext cx="2808312" cy="215444"/>
-          </a:xfrm>
-          <a:prstGeom prst="rect">
-            <a:avLst/>
-          </a:prstGeom>
-          <a:noFill/>
-        </p:spPr>
-        <p:txBody>
-          <a:bodyPr wrap="square" lIns="0" tIns="0" rIns="0" bIns="0">
-            <a:spAutoFit/>
-          </a:bodyPr>
-          <a:lstStyle/>
-          <a:p>
-            <a:pPr algn="ctr"/>
-            <a:r>
-              <a:rPr lang="ko-KR" altLang="en-US" spc="-200" dirty="0">
-                <a:solidFill>
-                  <a:prstClr val="white">
-                    <a:lumMod val="50000"/>
-                  </a:prstClr>
-                </a:solidFill>
-                <a:latin typeface="궁서" panose="02030600000101010101" pitchFamily="18" charset="-127"/>
-                <a:ea typeface="궁서" panose="02030600000101010101" pitchFamily="18" charset="-127"/>
-              </a:rPr>
-              <a:t>가톨릭 기도서 © 한국천주교중앙협의회</a:t>
-            </a:r>
-          </a:p>
-        </p:txBody>
-      </p:sp>
-    </p:spTree>
-    <p:extLst>
-      <p:ext uri="{BB962C8B-B14F-4D97-AF65-F5344CB8AC3E}">
-        <p14:creationId xmlns:p14="http://schemas.microsoft.com/office/powerpoint/2010/main" xmlns="" val="1308187922"/>
-      </p:ext>
-    </p:extLst>
-  </p:cSld>
-  <p:clrMapOvr>
-    <a:masterClrMapping/>
-  </p:clrMapOvr>
-  <p:timing>
-    <p:tnLst>
-      <p:par>
-        <p:cTn id="1" dur="indefinite" restart="never" nodeType="tmRoot"/>
-      </p:par>
-    </p:tnLst>
-  </p:timing>
-</p:sld>
-</file>
-
-<file path=ppt/slides/slide64.xml><?xml version="1.0" encoding="utf-8"?>
-<p:sld xmlns:a="http://schemas.openxmlformats.org/drawingml/2006/main" xmlns:r="http://schemas.openxmlformats.org/officeDocument/2006/relationships" xmlns:p="http://schemas.openxmlformats.org/presentationml/2006/main" showMasterSp="0">
-  <p:cSld>
-    <p:spTree>
-      <p:nvGrpSpPr>
-        <p:cNvPr id="1" name=""/>
-        <p:cNvGrpSpPr/>
-        <p:nvPr/>
-      </p:nvGrpSpPr>
-      <p:grpSpPr>
-        <a:xfrm>
-          <a:off x="0" y="0"/>
-          <a:ext cx="0" cy="0"/>
-          <a:chOff x="0" y="0"/>
-          <a:chExt cx="0" cy="0"/>
-        </a:xfrm>
-      </p:grpSpPr>
-      <p:sp>
-        <p:nvSpPr>
-          <p:cNvPr id="9" name="Rectangle 8"/>
-          <p:cNvSpPr/>
-          <p:nvPr/>
-        </p:nvSpPr>
-        <p:spPr>
-          <a:xfrm>
-            <a:off x="179512" y="537763"/>
-            <a:ext cx="8784976" cy="3701463"/>
-          </a:xfrm>
-          <a:prstGeom prst="rect">
-            <a:avLst/>
-          </a:prstGeom>
-        </p:spPr>
-        <p:txBody>
-          <a:bodyPr wrap="square">
-            <a:spAutoFit/>
-          </a:bodyPr>
-          <a:lstStyle/>
-          <a:p>
-            <a:pPr marL="717550" indent="-717550">
-              <a:lnSpc>
-                <a:spcPct val="125000"/>
-              </a:lnSpc>
-              <a:spcAft>
-                <a:spcPts val="1200"/>
-              </a:spcAft>
-            </a:pPr>
-            <a:r>
-              <a:rPr lang="ko-KR" altLang="en-US" sz="3000" b="1" dirty="0">
-                <a:solidFill>
-                  <a:srgbClr val="EEECE1">
-                    <a:lumMod val="90000"/>
-                  </a:srgbClr>
-                </a:solidFill>
-                <a:latin typeface="바탕" pitchFamily="18" charset="-127"/>
-                <a:ea typeface="바탕" pitchFamily="18" charset="-127"/>
-              </a:rPr>
-              <a:t>○</a:t>
-            </a:r>
-            <a:r>
-              <a:rPr lang="en-US" altLang="ko-KR" sz="3000" b="1" dirty="0">
-                <a:solidFill>
-                  <a:srgbClr val="EEECE1">
-                    <a:lumMod val="90000"/>
-                  </a:srgbClr>
-                </a:solidFill>
-                <a:latin typeface="바탕" pitchFamily="18" charset="-127"/>
-                <a:ea typeface="바탕" pitchFamily="18" charset="-127"/>
-              </a:rPr>
-              <a:t>  	</a:t>
-            </a:r>
-            <a:r>
-              <a:rPr lang="ko-KR" altLang="en-US" sz="3200" b="1" dirty="0">
-                <a:solidFill>
-                  <a:srgbClr val="DDD9C3"/>
-                </a:solidFill>
-                <a:latin typeface="Batang" panose="02030600000101010101" pitchFamily="18" charset="-127"/>
-                <a:ea typeface="Batang" panose="02030600000101010101" pitchFamily="18" charset="-127"/>
-              </a:rPr>
-              <a:t>자비로우신 하느님 아버지</a:t>
-            </a:r>
-            <a:r>
-              <a:rPr lang="en-US" altLang="ko-KR" sz="3200" b="1" dirty="0">
-                <a:solidFill>
-                  <a:srgbClr val="DDD9C3"/>
-                </a:solidFill>
-                <a:latin typeface="Batang" panose="02030600000101010101" pitchFamily="18" charset="-127"/>
-                <a:ea typeface="Batang" panose="02030600000101010101" pitchFamily="18" charset="-127"/>
-              </a:rPr>
-              <a:t>, </a:t>
-            </a:r>
-            <a:r>
-              <a:rPr lang="ko-KR" altLang="en-US" sz="3200" b="1" dirty="0">
-                <a:solidFill>
-                  <a:srgbClr val="DDD9C3"/>
-                </a:solidFill>
-                <a:latin typeface="Batang" panose="02030600000101010101" pitchFamily="18" charset="-127"/>
-                <a:ea typeface="Batang" panose="02030600000101010101" pitchFamily="18" charset="-127"/>
-              </a:rPr>
-              <a:t>간절히 청하오니 가경자 최양업 토마스 신부에게 시복 시성의 은혜를 허락하시어 그에게 주셨던 굳건한 믿음과 온전한 헌신의 정신을 본받아 오늘 저희도 한마음으로 복음을 살고 전하는 일꾼이 되게 하소서</a:t>
-            </a:r>
-            <a:r>
-              <a:rPr lang="en-US" altLang="ko-KR" sz="3200" b="1" dirty="0">
-                <a:solidFill>
-                  <a:srgbClr val="DDD9C3"/>
-                </a:solidFill>
-                <a:latin typeface="Batang" panose="02030600000101010101" pitchFamily="18" charset="-127"/>
-                <a:ea typeface="Batang" panose="02030600000101010101" pitchFamily="18" charset="-127"/>
-              </a:rPr>
-              <a:t>.</a:t>
-            </a:r>
-            <a:endParaRPr lang="en-US" altLang="ko-KR" sz="3200" b="1" dirty="0">
-              <a:solidFill>
-                <a:prstClr val="white"/>
-              </a:solidFill>
-              <a:latin typeface="Batang" panose="02030600000101010101" pitchFamily="18" charset="-127"/>
-              <a:ea typeface="Batang" panose="02030600000101010101" pitchFamily="18" charset="-127"/>
-            </a:endParaRPr>
-          </a:p>
-        </p:txBody>
-      </p:sp>
-      <p:sp>
-        <p:nvSpPr>
-          <p:cNvPr id="4" name="TextBox 3">
-            <a:extLst>
-              <a:ext uri="{FF2B5EF4-FFF2-40B4-BE49-F238E27FC236}">
-                <a16:creationId xmlns:a16="http://schemas.microsoft.com/office/drawing/2014/main" xmlns="" id="{67C8B50A-87C0-41C7-83D4-96B95F8F1E2D}"/>
-              </a:ext>
-            </a:extLst>
-          </p:cNvPr>
-          <p:cNvSpPr txBox="1"/>
-          <p:nvPr/>
-        </p:nvSpPr>
-        <p:spPr>
-          <a:xfrm>
-            <a:off x="6228184" y="4825685"/>
-            <a:ext cx="2808312" cy="215444"/>
-          </a:xfrm>
-          <a:prstGeom prst="rect">
-            <a:avLst/>
-          </a:prstGeom>
-          <a:noFill/>
-        </p:spPr>
-        <p:txBody>
-          <a:bodyPr wrap="square" lIns="0" tIns="0" rIns="0" bIns="0">
-            <a:spAutoFit/>
-          </a:bodyPr>
-          <a:lstStyle/>
-          <a:p>
-            <a:pPr algn="ctr"/>
-            <a:r>
-              <a:rPr lang="ko-KR" altLang="en-US" spc="-200" dirty="0">
-                <a:solidFill>
-                  <a:prstClr val="white">
-                    <a:lumMod val="50000"/>
-                  </a:prstClr>
-                </a:solidFill>
-                <a:latin typeface="궁서" panose="02030600000101010101" pitchFamily="18" charset="-127"/>
-                <a:ea typeface="궁서" panose="02030600000101010101" pitchFamily="18" charset="-127"/>
-              </a:rPr>
-              <a:t>가톨릭 기도서 © 한국천주교중앙협의회</a:t>
-            </a:r>
-          </a:p>
-        </p:txBody>
-      </p:sp>
-    </p:spTree>
-    <p:extLst>
-      <p:ext uri="{BB962C8B-B14F-4D97-AF65-F5344CB8AC3E}">
-        <p14:creationId xmlns:p14="http://schemas.microsoft.com/office/powerpoint/2010/main" xmlns="" val="3585405468"/>
-      </p:ext>
-    </p:extLst>
-  </p:cSld>
-  <p:clrMapOvr>
-    <a:masterClrMapping/>
-  </p:clrMapOvr>
-  <p:timing>
-    <p:tnLst>
-      <p:par>
-        <p:cTn id="1" dur="indefinite" restart="never" nodeType="tmRoot"/>
-      </p:par>
-    </p:tnLst>
-  </p:timing>
-</p:sld>
-</file>
-
-<file path=ppt/slides/slide65.xml><?xml version="1.0" encoding="utf-8"?>
-<p:sld xmlns:a="http://schemas.openxmlformats.org/drawingml/2006/main" xmlns:r="http://schemas.openxmlformats.org/officeDocument/2006/relationships" xmlns:p="http://schemas.openxmlformats.org/presentationml/2006/main" showMasterSp="0">
-  <p:cSld>
-    <p:spTree>
-      <p:nvGrpSpPr>
-        <p:cNvPr id="1" name=""/>
-        <p:cNvGrpSpPr/>
-        <p:nvPr/>
-      </p:nvGrpSpPr>
-      <p:grpSpPr>
-        <a:xfrm>
-          <a:off x="0" y="0"/>
-          <a:ext cx="0" cy="0"/>
-          <a:chOff x="0" y="0"/>
-          <a:chExt cx="0" cy="0"/>
-        </a:xfrm>
-      </p:grpSpPr>
-      <p:sp>
-        <p:nvSpPr>
-          <p:cNvPr id="9" name="Rectangle 8"/>
-          <p:cNvSpPr/>
-          <p:nvPr/>
-        </p:nvSpPr>
-        <p:spPr>
-          <a:xfrm>
-            <a:off x="35496" y="102371"/>
-            <a:ext cx="9073008" cy="4816703"/>
-          </a:xfrm>
-          <a:prstGeom prst="rect">
-            <a:avLst/>
-          </a:prstGeom>
-        </p:spPr>
-        <p:txBody>
-          <a:bodyPr wrap="square">
-            <a:spAutoFit/>
-          </a:bodyPr>
-          <a:lstStyle/>
-          <a:p>
-            <a:pPr marL="625475" indent="-625475">
-              <a:lnSpc>
-                <a:spcPct val="150000"/>
-              </a:lnSpc>
-              <a:spcAft>
-                <a:spcPts val="2400"/>
-              </a:spcAft>
-            </a:pPr>
-            <a:r>
-              <a:rPr lang="ko-KR" altLang="en-US" sz="3200" dirty="0">
-                <a:solidFill>
-                  <a:prstClr val="white"/>
-                </a:solidFill>
-                <a:latin typeface="바탕" pitchFamily="18" charset="-127"/>
-                <a:ea typeface="바탕" pitchFamily="18" charset="-127"/>
-              </a:rPr>
-              <a:t>●</a:t>
-            </a:r>
-            <a:r>
-              <a:rPr lang="en-US" altLang="ko-KR" sz="3200" b="1" dirty="0">
-                <a:solidFill>
-                  <a:srgbClr val="DDD9C3"/>
-                </a:solidFill>
-                <a:latin typeface="Batang" panose="02030600000101010101" pitchFamily="18" charset="-127"/>
-                <a:ea typeface="Batang" panose="02030600000101010101" pitchFamily="18" charset="-127"/>
-              </a:rPr>
-              <a:t> </a:t>
-            </a:r>
-            <a:r>
-              <a:rPr lang="en-AU" altLang="ko-KR" sz="4000" dirty="0">
-                <a:solidFill>
-                  <a:srgbClr val="444444"/>
-                </a:solidFill>
-                <a:latin typeface="Nanum Gothic Thin"/>
-                <a:ea typeface="Batang" panose="02030600000101010101" pitchFamily="18" charset="-127"/>
-              </a:rPr>
-              <a:t>	</a:t>
-            </a:r>
-            <a:r>
-              <a:rPr lang="ko-KR" altLang="en-US" sz="3200" b="1" spc="-50" dirty="0">
-                <a:solidFill>
-                  <a:prstClr val="white"/>
-                </a:solidFill>
-                <a:latin typeface="Batang" panose="02030600000101010101" pitchFamily="18" charset="-127"/>
-                <a:ea typeface="Batang" panose="02030600000101010101" pitchFamily="18" charset="-127"/>
-              </a:rPr>
-              <a:t>저희는 가경자 최양업 신부의 시복 시성의 은총을 빌며 그의 전구에 힘입어 브로큰베이 한인천주교회를 위하여 기도드리오니 들어주소서</a:t>
-            </a:r>
-            <a:r>
-              <a:rPr lang="en-US" altLang="ko-KR" sz="3200" b="1" spc="-50" dirty="0">
-                <a:solidFill>
-                  <a:prstClr val="white"/>
-                </a:solidFill>
-                <a:latin typeface="Batang" panose="02030600000101010101" pitchFamily="18" charset="-127"/>
-                <a:ea typeface="Batang" panose="02030600000101010101" pitchFamily="18" charset="-127"/>
-              </a:rPr>
-              <a:t>. </a:t>
-            </a:r>
-            <a:r>
-              <a:rPr lang="ko-KR" altLang="en-US" sz="3200" b="1" spc="-50" dirty="0">
-                <a:solidFill>
-                  <a:prstClr val="white"/>
-                </a:solidFill>
-                <a:latin typeface="Batang" panose="02030600000101010101" pitchFamily="18" charset="-127"/>
-                <a:ea typeface="Batang" panose="02030600000101010101" pitchFamily="18" charset="-127"/>
-              </a:rPr>
-              <a:t>우리 주 그리스도를 통하여 비나이다</a:t>
-            </a:r>
-            <a:r>
-              <a:rPr lang="en-US" altLang="ko-KR" sz="3200" b="1" spc="-50" dirty="0">
-                <a:solidFill>
-                  <a:prstClr val="white"/>
-                </a:solidFill>
-                <a:latin typeface="Batang" panose="02030600000101010101" pitchFamily="18" charset="-127"/>
-                <a:ea typeface="Batang" panose="02030600000101010101" pitchFamily="18" charset="-127"/>
-              </a:rPr>
-              <a:t>.</a:t>
-            </a:r>
-            <a:r>
-              <a:rPr lang="en-US" altLang="ko-KR" sz="3200" b="1" dirty="0">
-                <a:solidFill>
-                  <a:prstClr val="white"/>
-                </a:solidFill>
-                <a:latin typeface="Batang" panose="02030600000101010101" pitchFamily="18" charset="-127"/>
-                <a:ea typeface="Batang" panose="02030600000101010101" pitchFamily="18" charset="-127"/>
-              </a:rPr>
-              <a:t>     </a:t>
-            </a:r>
-          </a:p>
-          <a:p>
-            <a:pPr marL="625475" indent="-625475">
-              <a:spcAft>
-                <a:spcPts val="1200"/>
-              </a:spcAft>
-            </a:pPr>
-            <a:r>
-              <a:rPr lang="ko-KR" altLang="en-US" sz="3500" b="1" dirty="0">
-                <a:solidFill>
-                  <a:prstClr val="white"/>
-                </a:solidFill>
-                <a:latin typeface="바탕" panose="02030600000101010101" pitchFamily="18" charset="-127"/>
-                <a:ea typeface="바탕" panose="02030600000101010101" pitchFamily="18" charset="-127"/>
-              </a:rPr>
-              <a:t>◎</a:t>
-            </a:r>
-            <a:r>
-              <a:rPr lang="en-US" altLang="ko-KR" sz="3500" b="1" dirty="0">
-                <a:solidFill>
-                  <a:prstClr val="white"/>
-                </a:solidFill>
-                <a:latin typeface="바탕" panose="02030600000101010101" pitchFamily="18" charset="-127"/>
-                <a:ea typeface="바탕" panose="02030600000101010101" pitchFamily="18" charset="-127"/>
-              </a:rPr>
-              <a:t>		</a:t>
-            </a:r>
-            <a:r>
-              <a:rPr lang="ko-KR" altLang="en-US" sz="3500" b="1" dirty="0">
-                <a:solidFill>
-                  <a:prstClr val="white"/>
-                </a:solidFill>
-                <a:latin typeface="바탕" panose="02030600000101010101" pitchFamily="18" charset="-127"/>
-                <a:ea typeface="바탕" panose="02030600000101010101" pitchFamily="18" charset="-127"/>
-              </a:rPr>
-              <a:t>아 멘</a:t>
-            </a:r>
-            <a:r>
-              <a:rPr lang="en-US" altLang="ko-KR" sz="3500" b="1" dirty="0">
-                <a:solidFill>
-                  <a:prstClr val="white"/>
-                </a:solidFill>
-                <a:latin typeface="바탕" panose="02030600000101010101" pitchFamily="18" charset="-127"/>
-                <a:ea typeface="바탕" panose="02030600000101010101" pitchFamily="18" charset="-127"/>
-              </a:rPr>
-              <a:t>.</a:t>
-            </a:r>
-          </a:p>
-        </p:txBody>
-      </p:sp>
-      <p:sp>
-        <p:nvSpPr>
-          <p:cNvPr id="4" name="TextBox 3">
-            <a:extLst>
-              <a:ext uri="{FF2B5EF4-FFF2-40B4-BE49-F238E27FC236}">
-                <a16:creationId xmlns:a16="http://schemas.microsoft.com/office/drawing/2014/main" xmlns="" id="{3C196F71-023D-4BE4-8EE4-DF4BF5614C97}"/>
-              </a:ext>
-            </a:extLst>
-          </p:cNvPr>
-          <p:cNvSpPr txBox="1"/>
-          <p:nvPr/>
-        </p:nvSpPr>
-        <p:spPr>
-          <a:xfrm>
-            <a:off x="6228184" y="4825685"/>
-            <a:ext cx="2808312" cy="215444"/>
-          </a:xfrm>
-          <a:prstGeom prst="rect">
-            <a:avLst/>
-          </a:prstGeom>
-          <a:noFill/>
-        </p:spPr>
-        <p:txBody>
-          <a:bodyPr wrap="square" lIns="0" tIns="0" rIns="0" bIns="0">
-            <a:spAutoFit/>
-          </a:bodyPr>
-          <a:lstStyle/>
-          <a:p>
-            <a:pPr algn="ctr"/>
-            <a:r>
-              <a:rPr lang="ko-KR" altLang="en-US" spc="-200" dirty="0">
-                <a:solidFill>
-                  <a:prstClr val="white">
-                    <a:lumMod val="50000"/>
-                  </a:prstClr>
-                </a:solidFill>
-                <a:latin typeface="궁서" panose="02030600000101010101" pitchFamily="18" charset="-127"/>
-                <a:ea typeface="궁서" panose="02030600000101010101" pitchFamily="18" charset="-127"/>
-              </a:rPr>
-              <a:t>가톨릭 기도서 © 한국천주교중앙협의회</a:t>
-            </a:r>
-          </a:p>
-        </p:txBody>
-      </p:sp>
-    </p:spTree>
-    <p:extLst>
-      <p:ext uri="{BB962C8B-B14F-4D97-AF65-F5344CB8AC3E}">
-        <p14:creationId xmlns:p14="http://schemas.microsoft.com/office/powerpoint/2010/main" xmlns="" val="585637866"/>
       </p:ext>
     </p:extLst>
   </p:cSld>

--- a/20260722/20260722_성녀 마리아 막달레나 축일.pptx
+++ b/20260722/20260722_성녀 마리아 막달레나 축일.pptx
@@ -65,10 +65,10 @@
     <p:sldId id="1379" r:id="rId63"/>
     <p:sldId id="1441" r:id="rId64"/>
     <p:sldId id="1492" r:id="rId65"/>
-    <p:sldId id="2543" r:id="rId66"/>
-    <p:sldId id="2544" r:id="rId67"/>
-    <p:sldId id="2545" r:id="rId68"/>
-    <p:sldId id="2546" r:id="rId69"/>
+    <p:sldId id="2532" r:id="rId66"/>
+    <p:sldId id="2533" r:id="rId67"/>
+    <p:sldId id="2534" r:id="rId68"/>
+    <p:sldId id="2535" r:id="rId69"/>
     <p:sldId id="2505" r:id="rId70"/>
     <p:sldId id="893" r:id="rId71"/>
   </p:sldIdLst>
@@ -271,7 +271,7 @@
             <a:fld id="{928ACA7C-5262-4C8E-AE19-3DA31B6A1CDA}" type="datetimeFigureOut">
               <a:rPr lang="en-AU" smtClean="0"/>
               <a:pPr/>
-              <a:t>10/06/2026</a:t>
+              <a:t>1/08/2026</a:t>
             </a:fld>
             <a:endParaRPr lang="en-AU" dirty="0"/>
           </a:p>
@@ -1914,6 +1914,342 @@
 </p:notes>
 </file>
 
+<file path=ppt/notesSlides/notesSlide32.xml><?xml version="1.0" encoding="utf-8"?>
+<p:notes xmlns:a="http://schemas.openxmlformats.org/drawingml/2006/main" xmlns:r="http://schemas.openxmlformats.org/officeDocument/2006/relationships" xmlns:p="http://schemas.openxmlformats.org/presentationml/2006/main">
+  <p:cSld>
+    <p:spTree>
+      <p:nvGrpSpPr>
+        <p:cNvPr id="1" name=""/>
+        <p:cNvGrpSpPr/>
+        <p:nvPr/>
+      </p:nvGrpSpPr>
+      <p:grpSpPr>
+        <a:xfrm>
+          <a:off x="0" y="0"/>
+          <a:ext cx="0" cy="0"/>
+          <a:chOff x="0" y="0"/>
+          <a:chExt cx="0" cy="0"/>
+        </a:xfrm>
+      </p:grpSpPr>
+      <p:sp>
+        <p:nvSpPr>
+          <p:cNvPr id="34818" name="Rectangle 2"/>
+          <p:cNvSpPr>
+            <a:spLocks noGrp="1" noRot="1" noChangeAspect="1" noChangeArrowheads="1" noTextEdit="1"/>
+          </p:cNvSpPr>
+          <p:nvPr>
+            <p:ph type="sldImg"/>
+          </p:nvPr>
+        </p:nvSpPr>
+        <p:spPr>
+          <a:xfrm>
+            <a:off x="381000" y="685800"/>
+            <a:ext cx="6096000" cy="3429000"/>
+          </a:xfrm>
+          <a:ln/>
+        </p:spPr>
+      </p:sp>
+      <p:sp>
+        <p:nvSpPr>
+          <p:cNvPr id="34819" name="Rectangle 3"/>
+          <p:cNvSpPr>
+            <a:spLocks noGrp="1" noChangeArrowheads="1"/>
+          </p:cNvSpPr>
+          <p:nvPr>
+            <p:ph type="body" idx="1"/>
+          </p:nvPr>
+        </p:nvSpPr>
+        <p:spPr>
+          <a:noFill/>
+          <a:ln/>
+        </p:spPr>
+        <p:txBody>
+          <a:bodyPr/>
+          <a:lstStyle/>
+          <a:p>
+            <a:r>
+              <a:rPr lang="ko-KR" altLang="en-US" dirty="0"/>
+              <a:t/>
+            </a:r>
+            <a:br>
+              <a:rPr lang="ko-KR" altLang="en-US" dirty="0"/>
+            </a:br>
+            <a:r>
+              <a:rPr lang="ko-KR" altLang="en-US" dirty="0"/>
+              <a:t/>
+            </a:r>
+            <a:br>
+              <a:rPr lang="ko-KR" altLang="en-US" dirty="0"/>
+            </a:br>
+            <a:endParaRPr lang="en-AU" altLang="ko-KR" dirty="0"/>
+          </a:p>
+        </p:txBody>
+      </p:sp>
+    </p:spTree>
+    <p:extLst>
+      <p:ext uri="{BB962C8B-B14F-4D97-AF65-F5344CB8AC3E}">
+        <p14:creationId xmlns:p14="http://schemas.microsoft.com/office/powerpoint/2010/main" xmlns="" val="3430105801"/>
+      </p:ext>
+    </p:extLst>
+  </p:cSld>
+  <p:clrMapOvr>
+    <a:masterClrMapping/>
+  </p:clrMapOvr>
+</p:notes>
+</file>
+
+<file path=ppt/notesSlides/notesSlide33.xml><?xml version="1.0" encoding="utf-8"?>
+<p:notes xmlns:a="http://schemas.openxmlformats.org/drawingml/2006/main" xmlns:r="http://schemas.openxmlformats.org/officeDocument/2006/relationships" xmlns:p="http://schemas.openxmlformats.org/presentationml/2006/main">
+  <p:cSld>
+    <p:spTree>
+      <p:nvGrpSpPr>
+        <p:cNvPr id="1" name=""/>
+        <p:cNvGrpSpPr/>
+        <p:nvPr/>
+      </p:nvGrpSpPr>
+      <p:grpSpPr>
+        <a:xfrm>
+          <a:off x="0" y="0"/>
+          <a:ext cx="0" cy="0"/>
+          <a:chOff x="0" y="0"/>
+          <a:chExt cx="0" cy="0"/>
+        </a:xfrm>
+      </p:grpSpPr>
+      <p:sp>
+        <p:nvSpPr>
+          <p:cNvPr id="34818" name="Rectangle 2"/>
+          <p:cNvSpPr>
+            <a:spLocks noGrp="1" noRot="1" noChangeAspect="1" noChangeArrowheads="1" noTextEdit="1"/>
+          </p:cNvSpPr>
+          <p:nvPr>
+            <p:ph type="sldImg"/>
+          </p:nvPr>
+        </p:nvSpPr>
+        <p:spPr>
+          <a:xfrm>
+            <a:off x="381000" y="685800"/>
+            <a:ext cx="6096000" cy="3429000"/>
+          </a:xfrm>
+          <a:ln/>
+        </p:spPr>
+      </p:sp>
+      <p:sp>
+        <p:nvSpPr>
+          <p:cNvPr id="34819" name="Rectangle 3"/>
+          <p:cNvSpPr>
+            <a:spLocks noGrp="1" noChangeArrowheads="1"/>
+          </p:cNvSpPr>
+          <p:nvPr>
+            <p:ph type="body" idx="1"/>
+          </p:nvPr>
+        </p:nvSpPr>
+        <p:spPr>
+          <a:noFill/>
+          <a:ln/>
+        </p:spPr>
+        <p:txBody>
+          <a:bodyPr/>
+          <a:lstStyle/>
+          <a:p>
+            <a:r>
+              <a:rPr lang="ko-KR" altLang="en-US" dirty="0"/>
+              <a:t/>
+            </a:r>
+            <a:br>
+              <a:rPr lang="ko-KR" altLang="en-US" dirty="0"/>
+            </a:br>
+            <a:r>
+              <a:rPr lang="ko-KR" altLang="en-US" dirty="0"/>
+              <a:t/>
+            </a:r>
+            <a:br>
+              <a:rPr lang="ko-KR" altLang="en-US" dirty="0"/>
+            </a:br>
+            <a:endParaRPr lang="en-AU" altLang="ko-KR" dirty="0"/>
+          </a:p>
+        </p:txBody>
+      </p:sp>
+    </p:spTree>
+    <p:extLst>
+      <p:ext uri="{BB962C8B-B14F-4D97-AF65-F5344CB8AC3E}">
+        <p14:creationId xmlns:p14="http://schemas.microsoft.com/office/powerpoint/2010/main" xmlns="" val="3430105801"/>
+      </p:ext>
+    </p:extLst>
+  </p:cSld>
+  <p:clrMapOvr>
+    <a:masterClrMapping/>
+  </p:clrMapOvr>
+</p:notes>
+</file>
+
+<file path=ppt/notesSlides/notesSlide34.xml><?xml version="1.0" encoding="utf-8"?>
+<p:notes xmlns:a="http://schemas.openxmlformats.org/drawingml/2006/main" xmlns:r="http://schemas.openxmlformats.org/officeDocument/2006/relationships" xmlns:p="http://schemas.openxmlformats.org/presentationml/2006/main">
+  <p:cSld>
+    <p:spTree>
+      <p:nvGrpSpPr>
+        <p:cNvPr id="1" name=""/>
+        <p:cNvGrpSpPr/>
+        <p:nvPr/>
+      </p:nvGrpSpPr>
+      <p:grpSpPr>
+        <a:xfrm>
+          <a:off x="0" y="0"/>
+          <a:ext cx="0" cy="0"/>
+          <a:chOff x="0" y="0"/>
+          <a:chExt cx="0" cy="0"/>
+        </a:xfrm>
+      </p:grpSpPr>
+      <p:sp>
+        <p:nvSpPr>
+          <p:cNvPr id="34818" name="Rectangle 2"/>
+          <p:cNvSpPr>
+            <a:spLocks noGrp="1" noRot="1" noChangeAspect="1" noChangeArrowheads="1" noTextEdit="1"/>
+          </p:cNvSpPr>
+          <p:nvPr>
+            <p:ph type="sldImg"/>
+          </p:nvPr>
+        </p:nvSpPr>
+        <p:spPr>
+          <a:xfrm>
+            <a:off x="381000" y="685800"/>
+            <a:ext cx="6096000" cy="3429000"/>
+          </a:xfrm>
+          <a:ln/>
+        </p:spPr>
+      </p:sp>
+      <p:sp>
+        <p:nvSpPr>
+          <p:cNvPr id="34819" name="Rectangle 3"/>
+          <p:cNvSpPr>
+            <a:spLocks noGrp="1" noChangeArrowheads="1"/>
+          </p:cNvSpPr>
+          <p:nvPr>
+            <p:ph type="body" idx="1"/>
+          </p:nvPr>
+        </p:nvSpPr>
+        <p:spPr>
+          <a:noFill/>
+          <a:ln/>
+        </p:spPr>
+        <p:txBody>
+          <a:bodyPr/>
+          <a:lstStyle/>
+          <a:p>
+            <a:r>
+              <a:rPr lang="ko-KR" altLang="en-US" dirty="0"/>
+              <a:t/>
+            </a:r>
+            <a:br>
+              <a:rPr lang="ko-KR" altLang="en-US" dirty="0"/>
+            </a:br>
+            <a:r>
+              <a:rPr lang="ko-KR" altLang="en-US" dirty="0"/>
+              <a:t/>
+            </a:r>
+            <a:br>
+              <a:rPr lang="ko-KR" altLang="en-US" dirty="0"/>
+            </a:br>
+            <a:endParaRPr lang="en-AU" altLang="ko-KR" dirty="0"/>
+          </a:p>
+        </p:txBody>
+      </p:sp>
+    </p:spTree>
+    <p:extLst>
+      <p:ext uri="{BB962C8B-B14F-4D97-AF65-F5344CB8AC3E}">
+        <p14:creationId xmlns:p14="http://schemas.microsoft.com/office/powerpoint/2010/main" xmlns="" val="3093665762"/>
+      </p:ext>
+    </p:extLst>
+  </p:cSld>
+  <p:clrMapOvr>
+    <a:masterClrMapping/>
+  </p:clrMapOvr>
+</p:notes>
+</file>
+
+<file path=ppt/notesSlides/notesSlide35.xml><?xml version="1.0" encoding="utf-8"?>
+<p:notes xmlns:a="http://schemas.openxmlformats.org/drawingml/2006/main" xmlns:r="http://schemas.openxmlformats.org/officeDocument/2006/relationships" xmlns:p="http://schemas.openxmlformats.org/presentationml/2006/main">
+  <p:cSld>
+    <p:spTree>
+      <p:nvGrpSpPr>
+        <p:cNvPr id="1" name=""/>
+        <p:cNvGrpSpPr/>
+        <p:nvPr/>
+      </p:nvGrpSpPr>
+      <p:grpSpPr>
+        <a:xfrm>
+          <a:off x="0" y="0"/>
+          <a:ext cx="0" cy="0"/>
+          <a:chOff x="0" y="0"/>
+          <a:chExt cx="0" cy="0"/>
+        </a:xfrm>
+      </p:grpSpPr>
+      <p:sp>
+        <p:nvSpPr>
+          <p:cNvPr id="34818" name="Rectangle 2"/>
+          <p:cNvSpPr>
+            <a:spLocks noGrp="1" noRot="1" noChangeAspect="1" noChangeArrowheads="1" noTextEdit="1"/>
+          </p:cNvSpPr>
+          <p:nvPr>
+            <p:ph type="sldImg"/>
+          </p:nvPr>
+        </p:nvSpPr>
+        <p:spPr>
+          <a:xfrm>
+            <a:off x="381000" y="685800"/>
+            <a:ext cx="6096000" cy="3429000"/>
+          </a:xfrm>
+          <a:ln/>
+        </p:spPr>
+      </p:sp>
+      <p:sp>
+        <p:nvSpPr>
+          <p:cNvPr id="34819" name="Rectangle 3"/>
+          <p:cNvSpPr>
+            <a:spLocks noGrp="1" noChangeArrowheads="1"/>
+          </p:cNvSpPr>
+          <p:nvPr>
+            <p:ph type="body" idx="1"/>
+          </p:nvPr>
+        </p:nvSpPr>
+        <p:spPr>
+          <a:noFill/>
+          <a:ln/>
+        </p:spPr>
+        <p:txBody>
+          <a:bodyPr/>
+          <a:lstStyle/>
+          <a:p>
+            <a:r>
+              <a:rPr lang="ko-KR" altLang="en-US" dirty="0"/>
+              <a:t/>
+            </a:r>
+            <a:br>
+              <a:rPr lang="ko-KR" altLang="en-US" dirty="0"/>
+            </a:br>
+            <a:r>
+              <a:rPr lang="ko-KR" altLang="en-US" dirty="0"/>
+              <a:t/>
+            </a:r>
+            <a:br>
+              <a:rPr lang="ko-KR" altLang="en-US" dirty="0"/>
+            </a:br>
+            <a:endParaRPr lang="en-AU" altLang="ko-KR" dirty="0"/>
+          </a:p>
+        </p:txBody>
+      </p:sp>
+    </p:spTree>
+    <p:extLst>
+      <p:ext uri="{BB962C8B-B14F-4D97-AF65-F5344CB8AC3E}">
+        <p14:creationId xmlns:p14="http://schemas.microsoft.com/office/powerpoint/2010/main" xmlns="" val="392355683"/>
+      </p:ext>
+    </p:extLst>
+  </p:cSld>
+  <p:clrMapOvr>
+    <a:masterClrMapping/>
+  </p:clrMapOvr>
+</p:notes>
+</file>
+
 <file path=ppt/notesSlides/notesSlide4.xml><?xml version="1.0" encoding="utf-8"?>
 <p:notes xmlns:a="http://schemas.openxmlformats.org/drawingml/2006/main" xmlns:r="http://schemas.openxmlformats.org/officeDocument/2006/relationships" xmlns:p="http://schemas.openxmlformats.org/presentationml/2006/main">
   <p:cSld>
@@ -5113,7 +5449,7 @@
             <a:fld id="{1D8BD707-D9CF-40AE-B4C6-C98DA3205C09}" type="datetimeFigureOut">
               <a:rPr lang="en-US"/>
               <a:pPr/>
-              <a:t>6/10/2026</a:t>
+              <a:t>8/1/2026</a:t>
             </a:fld>
             <a:endParaRPr lang="en-US" dirty="0"/>
           </a:p>
@@ -5298,7 +5634,7 @@
             <a:fld id="{1D8BD707-D9CF-40AE-B4C6-C98DA3205C09}" type="datetimeFigureOut">
               <a:rPr lang="en-US"/>
               <a:pPr/>
-              <a:t>6/10/2026</a:t>
+              <a:t>8/1/2026</a:t>
             </a:fld>
             <a:endParaRPr lang="en-US" dirty="0"/>
           </a:p>
@@ -5475,7 +5811,7 @@
             <a:fld id="{1D8BD707-D9CF-40AE-B4C6-C98DA3205C09}" type="datetimeFigureOut">
               <a:rPr lang="en-US"/>
               <a:pPr/>
-              <a:t>6/10/2026</a:t>
+              <a:t>8/1/2026</a:t>
             </a:fld>
             <a:endParaRPr lang="en-US" dirty="0"/>
           </a:p>
@@ -8382,7 +8718,7 @@
                 </a:solidFill>
               </a:rPr>
               <a:pPr/>
-              <a:t>6/10/2026</a:t>
+              <a:t>8/1/2026</a:t>
             </a:fld>
             <a:endParaRPr lang="en-US" dirty="0">
               <a:solidFill>
@@ -8607,7 +8943,7 @@
                 </a:solidFill>
               </a:rPr>
               <a:pPr/>
-              <a:t>6/10/2026</a:t>
+              <a:t>8/1/2026</a:t>
             </a:fld>
             <a:endParaRPr lang="en-US" dirty="0">
               <a:solidFill>
@@ -8864,7 +9200,7 @@
                 </a:solidFill>
               </a:rPr>
               <a:pPr/>
-              <a:t>6/10/2026</a:t>
+              <a:t>8/1/2026</a:t>
             </a:fld>
             <a:endParaRPr lang="en-US" dirty="0">
               <a:solidFill>
@@ -9088,7 +9424,7 @@
                 </a:solidFill>
               </a:rPr>
               <a:pPr/>
-              <a:t>6/10/2026</a:t>
+              <a:t>8/1/2026</a:t>
             </a:fld>
             <a:endParaRPr lang="en-US" dirty="0">
               <a:solidFill>
@@ -9299,7 +9635,7 @@
                 </a:solidFill>
               </a:rPr>
               <a:pPr/>
-              <a:t>6/10/2026</a:t>
+              <a:t>8/1/2026</a:t>
             </a:fld>
             <a:endParaRPr lang="en-US" dirty="0">
               <a:solidFill>
@@ -12248,7 +12584,7 @@
                 </a:solidFill>
               </a:rPr>
               <a:pPr/>
-              <a:t>6/10/2026</a:t>
+              <a:t>8/1/2026</a:t>
             </a:fld>
             <a:endParaRPr lang="en-US" dirty="0">
               <a:solidFill>
@@ -12456,7 +12792,7 @@
             <a:fld id="{1D8BD707-D9CF-40AE-B4C6-C98DA3205C09}" type="datetimeFigureOut">
               <a:rPr lang="en-US"/>
               <a:pPr/>
-              <a:t>6/10/2026</a:t>
+              <a:t>8/1/2026</a:t>
             </a:fld>
             <a:endParaRPr lang="en-US" dirty="0"/>
           </a:p>
@@ -12658,7 +12994,7 @@
                 </a:solidFill>
               </a:rPr>
               <a:pPr/>
-              <a:t>6/10/2026</a:t>
+              <a:t>8/1/2026</a:t>
             </a:fld>
             <a:endParaRPr lang="en-US" dirty="0">
               <a:solidFill>
@@ -12910,7 +13246,7 @@
                 </a:solidFill>
               </a:rPr>
               <a:pPr/>
-              <a:t>6/10/2026</a:t>
+              <a:t>8/1/2026</a:t>
             </a:fld>
             <a:endParaRPr lang="en-US" dirty="0">
               <a:solidFill>
@@ -13129,7 +13465,7 @@
                 </a:solidFill>
               </a:rPr>
               <a:pPr/>
-              <a:t>6/10/2026</a:t>
+              <a:t>8/1/2026</a:t>
             </a:fld>
             <a:endParaRPr lang="en-US" dirty="0">
               <a:solidFill>
@@ -13335,7 +13671,7 @@
                 </a:solidFill>
               </a:rPr>
               <a:pPr/>
-              <a:t>6/10/2026</a:t>
+              <a:t>8/1/2026</a:t>
             </a:fld>
             <a:endParaRPr lang="en-US" dirty="0">
               <a:solidFill>
@@ -13715,7 +14051,7 @@
             <a:fld id="{1D8BD707-D9CF-40AE-B4C6-C98DA3205C09}" type="datetimeFigureOut">
               <a:rPr lang="en-US"/>
               <a:pPr/>
-              <a:t>6/10/2026</a:t>
+              <a:t>8/1/2026</a:t>
             </a:fld>
             <a:endParaRPr lang="en-US" dirty="0"/>
           </a:p>
@@ -13900,7 +14236,7 @@
             <a:fld id="{1D8BD707-D9CF-40AE-B4C6-C98DA3205C09}" type="datetimeFigureOut">
               <a:rPr lang="en-US"/>
               <a:pPr/>
-              <a:t>6/10/2026</a:t>
+              <a:t>8/1/2026</a:t>
             </a:fld>
             <a:endParaRPr lang="en-US" dirty="0"/>
           </a:p>
@@ -14072,7 +14408,7 @@
             <a:fld id="{1D8BD707-D9CF-40AE-B4C6-C98DA3205C09}" type="datetimeFigureOut">
               <a:rPr lang="en-US"/>
               <a:pPr/>
-              <a:t>6/10/2026</a:t>
+              <a:t>8/1/2026</a:t>
             </a:fld>
             <a:endParaRPr lang="en-US" dirty="0"/>
           </a:p>
@@ -16865,7 +17201,7 @@
             <a:fld id="{1D8BD707-D9CF-40AE-B4C6-C98DA3205C09}" type="datetimeFigureOut">
               <a:rPr lang="en-US"/>
               <a:pPr/>
-              <a:t>6/10/2026</a:t>
+              <a:t>8/1/2026</a:t>
             </a:fld>
             <a:endParaRPr lang="en-US" dirty="0"/>
           </a:p>
@@ -17060,7 +17396,7 @@
             <a:fld id="{1D8BD707-D9CF-40AE-B4C6-C98DA3205C09}" type="datetimeFigureOut">
               <a:rPr lang="en-US"/>
               <a:pPr/>
-              <a:t>6/10/2026</a:t>
+              <a:t>8/1/2026</a:t>
             </a:fld>
             <a:endParaRPr lang="en-US" dirty="0"/>
           </a:p>
@@ -17287,7 +17623,7 @@
             <a:fld id="{1D8BD707-D9CF-40AE-B4C6-C98DA3205C09}" type="datetimeFigureOut">
               <a:rPr lang="en-US"/>
               <a:pPr/>
-              <a:t>6/10/2026</a:t>
+              <a:t>8/1/2026</a:t>
             </a:fld>
             <a:endParaRPr lang="en-US" dirty="0"/>
           </a:p>
@@ -17520,7 +17856,7 @@
             <a:fld id="{1D8BD707-D9CF-40AE-B4C6-C98DA3205C09}" type="datetimeFigureOut">
               <a:rPr lang="en-US"/>
               <a:pPr/>
-              <a:t>6/10/2026</a:t>
+              <a:t>8/1/2026</a:t>
             </a:fld>
             <a:endParaRPr lang="en-US" dirty="0"/>
           </a:p>
@@ -17905,7 +18241,7 @@
             <a:fld id="{1D8BD707-D9CF-40AE-B4C6-C98DA3205C09}" type="datetimeFigureOut">
               <a:rPr lang="en-US"/>
               <a:pPr/>
-              <a:t>6/10/2026</a:t>
+              <a:t>8/1/2026</a:t>
             </a:fld>
             <a:endParaRPr lang="en-US" dirty="0"/>
           </a:p>
@@ -18307,7 +18643,7 @@
                 </a:solidFill>
               </a:rPr>
               <a:pPr/>
-              <a:t>6/10/2026</a:t>
+              <a:t>8/1/2026</a:t>
             </a:fld>
             <a:endParaRPr lang="en-US" dirty="0">
               <a:solidFill>
@@ -18727,7 +19063,7 @@
                 </a:solidFill>
               </a:rPr>
               <a:pPr/>
-              <a:t>6/10/2026</a:t>
+              <a:t>8/1/2026</a:t>
             </a:fld>
             <a:endParaRPr lang="en-US" dirty="0">
               <a:solidFill>
@@ -19320,7 +19656,7 @@
         <p:spPr>
           <a:xfrm>
             <a:off x="755576" y="915566"/>
-            <a:ext cx="7272808" cy="3785652"/>
+            <a:ext cx="7272808" cy="3323987"/>
           </a:xfrm>
           <a:prstGeom prst="rect">
             <a:avLst/>
@@ -19332,7 +19668,7 @@
           </a:bodyPr>
           <a:lstStyle/>
           <a:p>
-            <a:pPr>
+            <a:pPr marL="720000" indent="-720000">
               <a:lnSpc>
                 <a:spcPct val="100000"/>
               </a:lnSpc>
@@ -19350,13 +19686,6 @@
               </a:rPr>
               <a:t>◎ 	주님이 마리아 막달레나에게 말씀하셨다. 내 형제들에게 가서 전하여라. 나는 내 아버지시며 너희의 아버지신 분, 내 하느님이시며 너희의 하느님이신 분께 올라간다.</a:t>
             </a:r>
-            <a:endParaRPr lang="en-US" altLang="ko-KR" sz="4000" b="1" spc="-100" dirty="0">
-              <a:solidFill>
-                <a:schemeClr val="bg1"/>
-              </a:solidFill>
-              <a:latin typeface="바탕" panose="02030600000101010101" pitchFamily="18" charset="-127"/>
-              <a:ea typeface="바탕" panose="02030600000101010101" pitchFamily="18" charset="-127"/>
-            </a:endParaRPr>
           </a:p>
         </p:txBody>
       </p:sp>
@@ -19546,7 +19875,7 @@
                 <a:latin typeface="바탕" pitchFamily="18" charset="-127"/>
                 <a:ea typeface="바탕" pitchFamily="18" charset="-127"/>
               </a:rPr>
-              <a:t>66</a:t>
+              <a:t>26</a:t>
             </a:r>
             <a:endParaRPr lang="en-US" altLang="ko-KR" sz="4800" b="1" spc="1500" dirty="0">
               <a:latin typeface="바탕" pitchFamily="18" charset="-127"/>
@@ -22287,7 +22616,7 @@
         </p:nvSpPr>
         <p:spPr>
           <a:xfrm>
-            <a:off x="35496" y="51470"/>
+            <a:off x="35496" y="47376"/>
             <a:ext cx="9001000" cy="4828630"/>
           </a:xfrm>
           <a:prstGeom prst="rect">
@@ -22304,9 +22633,6 @@
               <a:lnSpc>
                 <a:spcPct val="110000"/>
               </a:lnSpc>
-              <a:spcAft>
-                <a:spcPts val="600"/>
-              </a:spcAft>
             </a:pPr>
             <a:r>
               <a:rPr lang="ko-KR" altLang="en-US" sz="3200" b="1" dirty="0" smtClean="0">
@@ -22324,9 +22650,6 @@
               <a:lnSpc>
                 <a:spcPct val="110000"/>
               </a:lnSpc>
-              <a:spcAft>
-                <a:spcPts val="600"/>
-              </a:spcAft>
             </a:pPr>
             <a:r>
               <a:rPr lang="ko-KR" altLang="en-US" sz="3200" b="1" dirty="0" smtClean="0">
@@ -22394,9 +22717,6 @@
               <a:lnSpc>
                 <a:spcPct val="110000"/>
               </a:lnSpc>
-              <a:spcAft>
-                <a:spcPts val="600"/>
-              </a:spcAft>
             </a:pPr>
             <a:r>
               <a:rPr lang="ko-KR" altLang="en-US" sz="3200" b="1" dirty="0" smtClean="0">
@@ -22484,9 +22804,6 @@
               <a:lnSpc>
                 <a:spcPct val="110000"/>
               </a:lnSpc>
-              <a:spcAft>
-                <a:spcPts val="600"/>
-              </a:spcAft>
             </a:pPr>
             <a:r>
               <a:rPr lang="ko-KR" altLang="en-US" sz="3200" b="1" dirty="0" smtClean="0">
@@ -22663,7 +22980,7 @@
         <p:spPr>
           <a:xfrm>
             <a:off x="35496" y="51470"/>
-            <a:ext cx="9001000" cy="4674741"/>
+            <a:ext cx="9001000" cy="4809458"/>
           </a:xfrm>
           <a:prstGeom prst="rect">
             <a:avLst/>
@@ -22679,9 +22996,6 @@
               <a:lnSpc>
                 <a:spcPct val="110000"/>
               </a:lnSpc>
-              <a:spcAft>
-                <a:spcPts val="600"/>
-              </a:spcAft>
             </a:pPr>
             <a:r>
               <a:rPr lang="en-US" altLang="ko-KR" sz="3200" b="1" dirty="0" smtClean="0">
@@ -22699,9 +23013,6 @@
               <a:lnSpc>
                 <a:spcPct val="110000"/>
               </a:lnSpc>
-              <a:spcAft>
-                <a:spcPts val="600"/>
-              </a:spcAft>
             </a:pPr>
             <a:r>
               <a:rPr lang="en-US" altLang="ko-KR" sz="3200" b="1" dirty="0" smtClean="0">
@@ -22762,7 +23073,7 @@
         </p:nvSpPr>
         <p:spPr>
           <a:xfrm>
-            <a:off x="683568" y="2648545"/>
+            <a:off x="683568" y="2723390"/>
             <a:ext cx="5421432" cy="1323439"/>
           </a:xfrm>
           <a:prstGeom prst="rect">
@@ -23645,243 +23956,6 @@
 </p:sld>
 </file>
 
-<file path=ppt/slides/slide29.xml><?xml version="1.0" encoding="utf-8"?>
-<p:sld xmlns:a="http://schemas.openxmlformats.org/drawingml/2006/main" xmlns:p="http://schemas.openxmlformats.org/presentationml/2006/main" xmlns:r="http://schemas.openxmlformats.org/officeDocument/2006/relationships">
-  <p:cSld>
-    <p:bg>
-      <p:bgPr>
-        <a:solidFill>
-          <a:schemeClr val="tx1"/>
-        </a:solidFill>
-        <a:effectLst/>
-      </p:bgPr>
-    </p:bg>
-    <p:spTree>
-      <p:nvGrpSpPr>
-        <p:cNvPr id="1" name=""/>
-        <p:cNvGrpSpPr/>
-        <p:nvPr/>
-      </p:nvGrpSpPr>
-      <p:grpSpPr/>
-      <p:sp>
-        <p:nvSpPr>
-          <p:cNvPr id="9" name="Rectangle 8"/>
-          <p:cNvSpPr/>
-          <p:nvPr/>
-        </p:nvSpPr>
-        <p:spPr>
-          <a:xfrm>
-            <a:off x="35496" y="102371"/>
-            <a:ext cx="9073008" cy="4816703"/>
-          </a:xfrm>
-          <a:prstGeom prst="rect">
-            <a:avLst/>
-          </a:prstGeom>
-        </p:spPr>
-        <p:txBody>
-          <a:bodyPr wrap="square">
-            <a:spAutoFit/>
-          </a:bodyPr>
-          <a:lstStyle/>
-          <a:p>
-            <a:pPr marL="625475" indent="-625475">
-              <a:lnSpc>
-                <a:spcPct val="150000"/>
-              </a:lnSpc>
-              <a:spcAft>
-                <a:spcPts val="2400"/>
-              </a:spcAft>
-            </a:pPr>
-            <a:r>
-              <a:rPr lang="ko-KR" altLang="en-US" sz="3200" dirty="0">
-                <a:solidFill>
-                  <a:schemeClr val="bg1"/>
-                </a:solidFill>
-                <a:latin typeface="바탕" pitchFamily="18" charset="-127"/>
-                <a:ea typeface="바탕" pitchFamily="18" charset="-127"/>
-              </a:rPr>
-              <a:t>●</a:t>
-            </a:r>
-            <a:r>
-              <a:rPr lang="en-US" altLang="ko-KR" sz="3200" b="1" dirty="0">
-                <a:solidFill>
-                  <a:srgbClr val="DDD9C3"/>
-                </a:solidFill>
-                <a:latin typeface="Batang" panose="02030600000101010101" pitchFamily="18" charset="-127"/>
-                <a:ea typeface="Batang" panose="02030600000101010101" pitchFamily="18" charset="-127"/>
-              </a:rPr>
-              <a:t> </a:t>
-            </a:r>
-            <a:r>
-              <a:rPr lang="en-AU" altLang="ko-KR" sz="4000" dirty="0">
-                <a:solidFill>
-                  <a:srgbClr val="444444"/>
-                </a:solidFill>
-                <a:latin typeface="Nanum Gothic Thin"/>
-                <a:ea typeface="Batang" panose="02030600000101010101" pitchFamily="18" charset="-127"/>
-              </a:rPr>
-              <a:t>	</a:t>
-            </a:r>
-            <a:r>
-              <a:rPr lang="ko-KR" altLang="en-US" sz="3200" b="1" spc="-50" dirty="0">
-                <a:solidFill>
-                  <a:schemeClr val="bg1"/>
-                </a:solidFill>
-                <a:latin typeface="Batang" panose="02030600000101010101" pitchFamily="18" charset="-127"/>
-                <a:ea typeface="Batang" panose="02030600000101010101" pitchFamily="18" charset="-127"/>
-              </a:rPr>
-              <a:t>저희는 가경자 최양업 신부의 시복 시성의 은총을 빌며 그의 전구에 힘입어 브로큰베이 한인천주교회를 위하여 기도드리오니 들어주소서</a:t>
-            </a:r>
-            <a:r>
-              <a:rPr lang="en-US" altLang="ko-KR" sz="3200" b="1" spc="-50" dirty="0">
-                <a:solidFill>
-                  <a:schemeClr val="bg1"/>
-                </a:solidFill>
-                <a:latin typeface="Batang" panose="02030600000101010101" pitchFamily="18" charset="-127"/>
-                <a:ea typeface="Batang" panose="02030600000101010101" pitchFamily="18" charset="-127"/>
-              </a:rPr>
-              <a:t>. </a:t>
-            </a:r>
-            <a:r>
-              <a:rPr lang="ko-KR" altLang="en-US" sz="3200" b="1" spc="-50" dirty="0">
-                <a:solidFill>
-                  <a:schemeClr val="bg1"/>
-                </a:solidFill>
-                <a:latin typeface="Batang" panose="02030600000101010101" pitchFamily="18" charset="-127"/>
-                <a:ea typeface="Batang" panose="02030600000101010101" pitchFamily="18" charset="-127"/>
-              </a:rPr>
-              <a:t>우리 주 그리스도를 통하여 비나이다</a:t>
-            </a:r>
-            <a:r>
-              <a:rPr lang="en-US" altLang="ko-KR" sz="3200" b="1" spc="-50" dirty="0">
-                <a:solidFill>
-                  <a:schemeClr val="bg1"/>
-                </a:solidFill>
-                <a:latin typeface="Batang" panose="02030600000101010101" pitchFamily="18" charset="-127"/>
-                <a:ea typeface="Batang" panose="02030600000101010101" pitchFamily="18" charset="-127"/>
-              </a:rPr>
-              <a:t>.</a:t>
-            </a:r>
-            <a:r>
-              <a:rPr lang="en-US" altLang="ko-KR" sz="3200" b="1" dirty="0">
-                <a:solidFill>
-                  <a:schemeClr val="bg1"/>
-                </a:solidFill>
-                <a:latin typeface="Batang" panose="02030600000101010101" pitchFamily="18" charset="-127"/>
-                <a:ea typeface="Batang" panose="02030600000101010101" pitchFamily="18" charset="-127"/>
-              </a:rPr>
-              <a:t>     </a:t>
-            </a:r>
-            <a:endParaRPr lang="en-US" altLang="ko-KR" sz="3200" b="1" i="0" dirty="0">
-              <a:solidFill>
-                <a:schemeClr val="bg1"/>
-              </a:solidFill>
-              <a:effectLst/>
-              <a:latin typeface="Batang" panose="02030600000101010101" pitchFamily="18" charset="-127"/>
-              <a:ea typeface="Batang" panose="02030600000101010101" pitchFamily="18" charset="-127"/>
-            </a:endParaRPr>
-          </a:p>
-          <a:p>
-            <a:pPr marL="625475" indent="-625475">
-              <a:spcAft>
-                <a:spcPts val="1200"/>
-              </a:spcAft>
-            </a:pPr>
-            <a:r>
-              <a:rPr lang="ko-KR" altLang="en-US" sz="3500" b="1" dirty="0">
-                <a:solidFill>
-                  <a:schemeClr val="bg1"/>
-                </a:solidFill>
-                <a:latin typeface="바탕" panose="02030600000101010101" pitchFamily="18" charset="-127"/>
-                <a:ea typeface="바탕" panose="02030600000101010101" pitchFamily="18" charset="-127"/>
-              </a:rPr>
-              <a:t>◎</a:t>
-            </a:r>
-            <a:r>
-              <a:rPr lang="en-US" altLang="ko-KR" sz="3500" b="1" dirty="0">
-                <a:solidFill>
-                  <a:schemeClr val="bg1"/>
-                </a:solidFill>
-                <a:latin typeface="바탕" panose="02030600000101010101" pitchFamily="18" charset="-127"/>
-                <a:ea typeface="바탕" panose="02030600000101010101" pitchFamily="18" charset="-127"/>
-              </a:rPr>
-              <a:t>		</a:t>
-            </a:r>
-            <a:r>
-              <a:rPr lang="ko-KR" altLang="en-US" sz="3500" b="1" dirty="0">
-                <a:solidFill>
-                  <a:schemeClr val="bg1"/>
-                </a:solidFill>
-                <a:latin typeface="바탕" panose="02030600000101010101" pitchFamily="18" charset="-127"/>
-                <a:ea typeface="바탕" panose="02030600000101010101" pitchFamily="18" charset="-127"/>
-              </a:rPr>
-              <a:t>아 멘</a:t>
-            </a:r>
-            <a:r>
-              <a:rPr lang="en-US" altLang="ko-KR" sz="3500" b="1" dirty="0">
-                <a:solidFill>
-                  <a:schemeClr val="bg1"/>
-                </a:solidFill>
-                <a:latin typeface="바탕" panose="02030600000101010101" pitchFamily="18" charset="-127"/>
-                <a:ea typeface="바탕" panose="02030600000101010101" pitchFamily="18" charset="-127"/>
-              </a:rPr>
-              <a:t>.</a:t>
-            </a:r>
-          </a:p>
-        </p:txBody>
-      </p:sp>
-      <p:sp>
-        <p:nvSpPr>
-          <p:cNvPr id="4" name="TextBox 3">
-            <a:extLst>
-              <a:ext uri="{FF2B5EF4-FFF2-40B4-BE49-F238E27FC236}">
-                <a16:creationId xmlns:a16="http://schemas.microsoft.com/office/drawing/2014/main" id="{3C196F71-023D-4BE4-8EE4-DF4BF5614C97}"/>
-              </a:ext>
-            </a:extLst>
-          </p:cNvPr>
-          <p:cNvSpPr txBox="1"/>
-          <p:nvPr/>
-        </p:nvSpPr>
-        <p:spPr>
-          <a:xfrm>
-            <a:off x="6228184" y="4825685"/>
-            <a:ext cx="2808312" cy="215444"/>
-          </a:xfrm>
-          <a:prstGeom prst="rect">
-            <a:avLst/>
-          </a:prstGeom>
-          <a:noFill/>
-        </p:spPr>
-        <p:txBody>
-          <a:bodyPr wrap="square" lIns="0" tIns="0" rIns="0" bIns="0">
-            <a:spAutoFit/>
-          </a:bodyPr>
-          <a:lstStyle/>
-          <a:p>
-            <a:pPr algn="ctr"/>
-            <a:r>
-              <a:rPr lang="ko-KR" altLang="en-US" spc="-200" dirty="0">
-                <a:solidFill>
-                  <a:schemeClr val="bg1">
-                    <a:lumMod val="50000"/>
-                  </a:schemeClr>
-                </a:solidFill>
-                <a:latin typeface="궁서" panose="02030600000101010101" pitchFamily="18" charset="-127"/>
-                <a:ea typeface="궁서" panose="02030600000101010101" pitchFamily="18" charset="-127"/>
-              </a:rPr>
-              <a:t>가톨릭 기도서 © 한국천주교중앙협의회</a:t>
-            </a:r>
-          </a:p>
-        </p:txBody>
-      </p:sp>
-    </p:spTree>
-  </p:cSld>
-  <p:clrMapOvr>
-    <a:masterClrMapping/>
-  </p:clrMapOvr>
-</p:sld>
-</file>
-
 <file path=ppt/slides/slide3.xml><?xml version="1.0" encoding="utf-8"?>
 <p:sld xmlns:a="http://schemas.openxmlformats.org/drawingml/2006/main" xmlns:r="http://schemas.openxmlformats.org/officeDocument/2006/relationships" xmlns:p="http://schemas.openxmlformats.org/presentationml/2006/main" showMasterSp="0">
   <p:cSld>
@@ -24147,328 +24221,6 @@
 </p:sld>
 </file>
 
-<file path=ppt/slides/slide30.xml><?xml version="1.0" encoding="utf-8"?>
-<p:sld xmlns:a="http://schemas.openxmlformats.org/drawingml/2006/main" xmlns:p="http://schemas.openxmlformats.org/presentationml/2006/main" xmlns:r="http://schemas.openxmlformats.org/officeDocument/2006/relationships">
-  <p:cSld>
-    <p:bg>
-      <p:bgPr>
-        <a:solidFill>
-          <a:schemeClr val="tx1"/>
-        </a:solidFill>
-        <a:effectLst/>
-      </p:bgPr>
-    </p:bg>
-    <p:spTree>
-      <p:nvGrpSpPr>
-        <p:cNvPr id="1" name=""/>
-        <p:cNvGrpSpPr/>
-        <p:nvPr/>
-      </p:nvGrpSpPr>
-      <p:grpSpPr/>
-      <p:sp>
-        <p:nvSpPr>
-          <p:cNvPr id="9" name="Rectangle 8"/>
-          <p:cNvSpPr/>
-          <p:nvPr/>
-        </p:nvSpPr>
-        <p:spPr>
-          <a:xfrm>
-            <a:off x="179512" y="537763"/>
-            <a:ext cx="8784976" cy="3701463"/>
-          </a:xfrm>
-          <a:prstGeom prst="rect">
-            <a:avLst/>
-          </a:prstGeom>
-        </p:spPr>
-        <p:txBody>
-          <a:bodyPr wrap="square">
-            <a:spAutoFit/>
-          </a:bodyPr>
-          <a:lstStyle/>
-          <a:p>
-            <a:pPr marL="717550" indent="-717550">
-              <a:lnSpc>
-                <a:spcPct val="125000"/>
-              </a:lnSpc>
-              <a:spcAft>
-                <a:spcPts val="1200"/>
-              </a:spcAft>
-            </a:pPr>
-            <a:r>
-              <a:rPr lang="ko-KR" altLang="en-US" sz="3000" b="1" dirty="0">
-                <a:solidFill>
-                  <a:schemeClr val="bg2">
-                    <a:lumMod val="90000"/>
-                  </a:schemeClr>
-                </a:solidFill>
-                <a:latin typeface="바탕" pitchFamily="18" charset="-127"/>
-                <a:ea typeface="바탕" pitchFamily="18" charset="-127"/>
-              </a:rPr>
-              <a:t>○</a:t>
-            </a:r>
-            <a:r>
-              <a:rPr lang="en-US" altLang="ko-KR" sz="3000" b="1" dirty="0">
-                <a:solidFill>
-                  <a:schemeClr val="bg2">
-                    <a:lumMod val="90000"/>
-                  </a:schemeClr>
-                </a:solidFill>
-                <a:latin typeface="바탕" pitchFamily="18" charset="-127"/>
-                <a:ea typeface="바탕" pitchFamily="18" charset="-127"/>
-              </a:rPr>
-              <a:t>  	</a:t>
-            </a:r>
-            <a:r>
-              <a:rPr lang="ko-KR" altLang="en-US" sz="3200" b="1" dirty="0">
-                <a:solidFill>
-                  <a:srgbClr val="DDD9C3"/>
-                </a:solidFill>
-                <a:latin typeface="Batang" panose="02030600000101010101" pitchFamily="18" charset="-127"/>
-                <a:ea typeface="Batang" panose="02030600000101010101" pitchFamily="18" charset="-127"/>
-              </a:rPr>
-              <a:t>자비로우신 하느님 아버지</a:t>
-            </a:r>
-            <a:r>
-              <a:rPr lang="en-US" altLang="ko-KR" sz="3200" b="1" dirty="0">
-                <a:solidFill>
-                  <a:srgbClr val="DDD9C3"/>
-                </a:solidFill>
-                <a:latin typeface="Batang" panose="02030600000101010101" pitchFamily="18" charset="-127"/>
-                <a:ea typeface="Batang" panose="02030600000101010101" pitchFamily="18" charset="-127"/>
-              </a:rPr>
-              <a:t>, </a:t>
-            </a:r>
-            <a:r>
-              <a:rPr lang="ko-KR" altLang="en-US" sz="3200" b="1" dirty="0">
-                <a:solidFill>
-                  <a:srgbClr val="DDD9C3"/>
-                </a:solidFill>
-                <a:latin typeface="Batang" panose="02030600000101010101" pitchFamily="18" charset="-127"/>
-                <a:ea typeface="Batang" panose="02030600000101010101" pitchFamily="18" charset="-127"/>
-              </a:rPr>
-              <a:t>간절히 청하오니 가경자 최양업 토마스 신부에게 시복 시성의 은혜를 허락하시어 그에게 주셨던 굳건한 믿음과 온전한 헌신의 정신을 본받아 오늘 저희도 한마음으로 복음을 살고 전하는 일꾼이 되게 하소서</a:t>
-            </a:r>
-            <a:r>
-              <a:rPr lang="en-US" altLang="ko-KR" sz="3200" b="1" dirty="0">
-                <a:solidFill>
-                  <a:srgbClr val="DDD9C3"/>
-                </a:solidFill>
-                <a:latin typeface="Batang" panose="02030600000101010101" pitchFamily="18" charset="-127"/>
-                <a:ea typeface="Batang" panose="02030600000101010101" pitchFamily="18" charset="-127"/>
-              </a:rPr>
-              <a:t>.</a:t>
-            </a:r>
-            <a:endParaRPr lang="en-US" altLang="ko-KR" sz="3200" b="1" dirty="0">
-              <a:solidFill>
-                <a:schemeClr val="bg1"/>
-              </a:solidFill>
-              <a:latin typeface="Batang" panose="02030600000101010101" pitchFamily="18" charset="-127"/>
-              <a:ea typeface="Batang" panose="02030600000101010101" pitchFamily="18" charset="-127"/>
-            </a:endParaRPr>
-          </a:p>
-        </p:txBody>
-      </p:sp>
-      <p:sp>
-        <p:nvSpPr>
-          <p:cNvPr id="4" name="TextBox 3">
-            <a:extLst>
-              <a:ext uri="{FF2B5EF4-FFF2-40B4-BE49-F238E27FC236}">
-                <a16:creationId xmlns:a16="http://schemas.microsoft.com/office/drawing/2014/main" id="{67C8B50A-87C0-41C7-83D4-96B95F8F1E2D}"/>
-              </a:ext>
-            </a:extLst>
-          </p:cNvPr>
-          <p:cNvSpPr txBox="1"/>
-          <p:nvPr/>
-        </p:nvSpPr>
-        <p:spPr>
-          <a:xfrm>
-            <a:off x="6228184" y="4825685"/>
-            <a:ext cx="2808312" cy="215444"/>
-          </a:xfrm>
-          <a:prstGeom prst="rect">
-            <a:avLst/>
-          </a:prstGeom>
-          <a:noFill/>
-        </p:spPr>
-        <p:txBody>
-          <a:bodyPr wrap="square" lIns="0" tIns="0" rIns="0" bIns="0">
-            <a:spAutoFit/>
-          </a:bodyPr>
-          <a:lstStyle/>
-          <a:p>
-            <a:pPr algn="ctr"/>
-            <a:r>
-              <a:rPr lang="ko-KR" altLang="en-US" spc="-200" dirty="0">
-                <a:solidFill>
-                  <a:schemeClr val="bg1">
-                    <a:lumMod val="50000"/>
-                  </a:schemeClr>
-                </a:solidFill>
-                <a:latin typeface="궁서" panose="02030600000101010101" pitchFamily="18" charset="-127"/>
-                <a:ea typeface="궁서" panose="02030600000101010101" pitchFamily="18" charset="-127"/>
-              </a:rPr>
-              <a:t>가톨릭 기도서 © 한국천주교중앙협의회</a:t>
-            </a:r>
-          </a:p>
-        </p:txBody>
-      </p:sp>
-    </p:spTree>
-  </p:cSld>
-  <p:clrMapOvr>
-    <a:masterClrMapping/>
-  </p:clrMapOvr>
-</p:sld>
-</file>
-
-<file path=ppt/slides/slide31.xml><?xml version="1.0" encoding="utf-8"?>
-<p:sld xmlns:a="http://schemas.openxmlformats.org/drawingml/2006/main" xmlns:p="http://schemas.openxmlformats.org/presentationml/2006/main" xmlns:r="http://schemas.openxmlformats.org/officeDocument/2006/relationships">
-  <p:cSld>
-    <p:bg>
-      <p:bgPr>
-        <a:solidFill>
-          <a:schemeClr val="tx1"/>
-        </a:solidFill>
-        <a:effectLst/>
-      </p:bgPr>
-    </p:bg>
-    <p:spTree>
-      <p:nvGrpSpPr>
-        <p:cNvPr id="1" name=""/>
-        <p:cNvGrpSpPr/>
-        <p:nvPr/>
-      </p:nvGrpSpPr>
-      <p:grpSpPr/>
-      <p:sp>
-        <p:nvSpPr>
-          <p:cNvPr id="9" name="Rectangle 8"/>
-          <p:cNvSpPr/>
-          <p:nvPr/>
-        </p:nvSpPr>
-        <p:spPr>
-          <a:xfrm>
-            <a:off x="78049" y="252036"/>
-            <a:ext cx="8991076" cy="4563237"/>
-          </a:xfrm>
-          <a:prstGeom prst="rect">
-            <a:avLst/>
-          </a:prstGeom>
-        </p:spPr>
-        <p:txBody>
-          <a:bodyPr wrap="square">
-            <a:spAutoFit/>
-          </a:bodyPr>
-          <a:lstStyle/>
-          <a:p>
-            <a:pPr marL="625475" indent="-625475">
-              <a:lnSpc>
-                <a:spcPct val="150000"/>
-              </a:lnSpc>
-              <a:spcAft>
-                <a:spcPts val="1200"/>
-              </a:spcAft>
-            </a:pPr>
-            <a:r>
-              <a:rPr lang="ko-KR" altLang="en-US" sz="3200" dirty="0">
-                <a:solidFill>
-                  <a:schemeClr val="bg1"/>
-                </a:solidFill>
-                <a:latin typeface="바탕" pitchFamily="18" charset="-127"/>
-                <a:ea typeface="바탕" pitchFamily="18" charset="-127"/>
-              </a:rPr>
-              <a:t>●</a:t>
-            </a:r>
-            <a:r>
-              <a:rPr lang="en-US" altLang="ko-KR" sz="3200" b="1" dirty="0">
-                <a:solidFill>
-                  <a:srgbClr val="DDD9C3"/>
-                </a:solidFill>
-                <a:latin typeface="Batang" panose="02030600000101010101" pitchFamily="18" charset="-127"/>
-                <a:ea typeface="Batang" panose="02030600000101010101" pitchFamily="18" charset="-127"/>
-              </a:rPr>
-              <a:t> 	</a:t>
-            </a:r>
-            <a:r>
-              <a:rPr lang="ko-KR" altLang="en-US" sz="3200" b="1" dirty="0">
-                <a:solidFill>
-                  <a:schemeClr val="bg1"/>
-                </a:solidFill>
-                <a:latin typeface="Batang" panose="02030600000101010101" pitchFamily="18" charset="-127"/>
-                <a:ea typeface="Batang" panose="02030600000101010101" pitchFamily="18" charset="-127"/>
-              </a:rPr>
-              <a:t>모든 교우들이 오로지 하느님 자비에 희망을 두고 박해를 피해 산골 깊이 숨어 신앙을 지켜야 했던 시대에 최양업 토마스 신부는 주님을 닮은 착한 목자로 목숨이 다할 때까지 쉼 없이 양들을 찾아 복음을 전하고 주님께서 이루신 구원의 은총을 전했나이다</a:t>
-            </a:r>
-            <a:r>
-              <a:rPr lang="en-AU" altLang="ko-KR" sz="3200" b="1" dirty="0">
-                <a:solidFill>
-                  <a:schemeClr val="bg1"/>
-                </a:solidFill>
-                <a:latin typeface="Batang" panose="02030600000101010101" pitchFamily="18" charset="-127"/>
-                <a:ea typeface="Batang" panose="02030600000101010101" pitchFamily="18" charset="-127"/>
-              </a:rPr>
-              <a:t>.</a:t>
-            </a:r>
-            <a:endParaRPr lang="en-US" altLang="ko-KR" sz="3200" b="1" dirty="0">
-              <a:solidFill>
-                <a:schemeClr val="bg1"/>
-              </a:solidFill>
-              <a:latin typeface="Batang" panose="02030600000101010101" pitchFamily="18" charset="-127"/>
-              <a:ea typeface="Batang" panose="02030600000101010101" pitchFamily="18" charset="-127"/>
-            </a:endParaRPr>
-          </a:p>
-        </p:txBody>
-      </p:sp>
-      <p:sp>
-        <p:nvSpPr>
-          <p:cNvPr id="5" name="TextBox 4">
-            <a:extLst>
-              <a:ext uri="{FF2B5EF4-FFF2-40B4-BE49-F238E27FC236}">
-                <a16:creationId xmlns:a16="http://schemas.microsoft.com/office/drawing/2014/main" id="{854A94FA-B5D4-48DC-994C-9FCB87C8A2E9}"/>
-              </a:ext>
-            </a:extLst>
-          </p:cNvPr>
-          <p:cNvSpPr txBox="1"/>
-          <p:nvPr/>
-        </p:nvSpPr>
-        <p:spPr>
-          <a:xfrm>
-            <a:off x="6228184" y="4825685"/>
-            <a:ext cx="2808312" cy="215444"/>
-          </a:xfrm>
-          <a:prstGeom prst="rect">
-            <a:avLst/>
-          </a:prstGeom>
-          <a:noFill/>
-        </p:spPr>
-        <p:txBody>
-          <a:bodyPr wrap="square" lIns="0" tIns="0" rIns="0" bIns="0">
-            <a:spAutoFit/>
-          </a:bodyPr>
-          <a:lstStyle/>
-          <a:p>
-            <a:pPr algn="ctr"/>
-            <a:r>
-              <a:rPr lang="ko-KR" altLang="en-US" spc="-200" dirty="0">
-                <a:solidFill>
-                  <a:schemeClr val="bg1">
-                    <a:lumMod val="50000"/>
-                  </a:schemeClr>
-                </a:solidFill>
-                <a:latin typeface="궁서" panose="02030600000101010101" pitchFamily="18" charset="-127"/>
-                <a:ea typeface="궁서" panose="02030600000101010101" pitchFamily="18" charset="-127"/>
-              </a:rPr>
-              <a:t>가톨릭 기도서 © 한국천주교중앙협의회</a:t>
-            </a:r>
-          </a:p>
-        </p:txBody>
-      </p:sp>
-    </p:spTree>
-  </p:cSld>
-  <p:clrMapOvr>
-    <a:masterClrMapping/>
-  </p:clrMapOvr>
-</p:sld>
-</file>
-
 <file path=ppt/slides/slide32.xml><?xml version="1.0" encoding="utf-8"?>
 <p:sld xmlns:a="http://schemas.openxmlformats.org/drawingml/2006/main" xmlns:p="http://schemas.openxmlformats.org/presentationml/2006/main" xmlns:r="http://schemas.openxmlformats.org/officeDocument/2006/relationships">
   <p:cSld>
@@ -24574,8 +24326,8 @@
         </p:nvSpPr>
         <p:spPr>
           <a:xfrm>
-            <a:off x="179512" y="51470"/>
-            <a:ext cx="8928992" cy="5121394"/>
+            <a:off x="179512" y="-1082"/>
+            <a:ext cx="8928992" cy="4901783"/>
           </a:xfrm>
           <a:prstGeom prst="rect">
             <a:avLst/>
@@ -24592,9 +24344,6 @@
               <a:lnSpc>
                 <a:spcPct val="110000"/>
               </a:lnSpc>
-              <a:spcAft>
-                <a:spcPts val="300"/>
-              </a:spcAft>
             </a:pPr>
             <a:r>
               <a:rPr lang="en-US" altLang="ko-KR" sz="3200" b="1" dirty="0" smtClean="0">
@@ -24643,7 +24392,7 @@
         </p:nvSpPr>
         <p:spPr>
           <a:xfrm>
-            <a:off x="179512" y="1758599"/>
+            <a:off x="179512" y="1632844"/>
             <a:ext cx="7272808" cy="3619444"/>
           </a:xfrm>
           <a:prstGeom prst="rect">
@@ -25011,8 +24760,8 @@
         </p:nvSpPr>
         <p:spPr>
           <a:xfrm>
-            <a:off x="179512" y="51470"/>
-            <a:ext cx="8928992" cy="5121394"/>
+            <a:off x="179512" y="-1082"/>
+            <a:ext cx="8928992" cy="4901783"/>
           </a:xfrm>
           <a:prstGeom prst="rect">
             <a:avLst/>
@@ -25029,9 +24778,6 @@
               <a:lnSpc>
                 <a:spcPct val="110000"/>
               </a:lnSpc>
-              <a:spcAft>
-                <a:spcPts val="300"/>
-              </a:spcAft>
             </a:pPr>
             <a:r>
               <a:rPr lang="en-US" altLang="ko-KR" sz="3200" b="1" dirty="0" smtClean="0">
@@ -25049,9 +24795,6 @@
               <a:lnSpc>
                 <a:spcPct val="110000"/>
               </a:lnSpc>
-              <a:spcAft>
-                <a:spcPts val="300"/>
-              </a:spcAft>
             </a:pPr>
             <a:r>
               <a:rPr lang="en-US" altLang="ko-KR" sz="3200" b="1" dirty="0" smtClean="0">
@@ -25179,9 +24922,6 @@
               <a:lnSpc>
                 <a:spcPct val="110000"/>
               </a:lnSpc>
-              <a:spcAft>
-                <a:spcPts val="300"/>
-              </a:spcAft>
             </a:pPr>
             <a:r>
               <a:rPr lang="en-US" altLang="ko-KR" sz="3200" b="1" dirty="0" smtClean="0">
@@ -25339,8 +25079,8 @@
         </p:nvSpPr>
         <p:spPr>
           <a:xfrm>
-            <a:off x="179512" y="51470"/>
-            <a:ext cx="8928992" cy="5121394"/>
+            <a:off x="179512" y="-1082"/>
+            <a:ext cx="8928992" cy="4901783"/>
           </a:xfrm>
           <a:prstGeom prst="rect">
             <a:avLst/>
@@ -25357,9 +25097,6 @@
               <a:lnSpc>
                 <a:spcPct val="110000"/>
               </a:lnSpc>
-              <a:spcAft>
-                <a:spcPts val="300"/>
-              </a:spcAft>
             </a:pPr>
             <a:r>
               <a:rPr lang="en-US" altLang="ko-KR" sz="3200" b="1" dirty="0" smtClean="0">
@@ -25377,9 +25114,6 @@
               <a:lnSpc>
                 <a:spcPct val="110000"/>
               </a:lnSpc>
-              <a:spcAft>
-                <a:spcPts val="300"/>
-              </a:spcAft>
             </a:pPr>
             <a:r>
               <a:rPr lang="en-US" altLang="ko-KR" sz="3200" b="1" dirty="0" smtClean="0">
@@ -25507,9 +25241,6 @@
               <a:lnSpc>
                 <a:spcPct val="110000"/>
               </a:lnSpc>
-              <a:spcAft>
-                <a:spcPts val="300"/>
-              </a:spcAft>
             </a:pPr>
             <a:r>
               <a:rPr lang="en-US" altLang="ko-KR" sz="3200" b="1" dirty="0" smtClean="0">
@@ -26473,8 +26204,8 @@
         </p:nvSpPr>
         <p:spPr>
           <a:xfrm>
-            <a:off x="179512" y="51470"/>
-            <a:ext cx="8928992" cy="5121394"/>
+            <a:off x="179512" y="-1082"/>
+            <a:ext cx="8928992" cy="4901783"/>
           </a:xfrm>
           <a:prstGeom prst="rect">
             <a:avLst/>
@@ -26491,9 +26222,6 @@
               <a:lnSpc>
                 <a:spcPct val="110000"/>
               </a:lnSpc>
-              <a:spcAft>
-                <a:spcPts val="300"/>
-              </a:spcAft>
             </a:pPr>
             <a:r>
               <a:rPr lang="en-US" altLang="ko-KR" sz="3200" b="1" dirty="0" smtClean="0">
@@ -26561,9 +26289,6 @@
               <a:lnSpc>
                 <a:spcPct val="110000"/>
               </a:lnSpc>
-              <a:spcAft>
-                <a:spcPts val="300"/>
-              </a:spcAft>
             </a:pPr>
             <a:r>
               <a:rPr lang="en-US" altLang="ko-KR" sz="3200" b="1" dirty="0" smtClean="0">
@@ -26651,9 +26376,6 @@
               <a:lnSpc>
                 <a:spcPct val="110000"/>
               </a:lnSpc>
-              <a:spcAft>
-                <a:spcPts val="300"/>
-              </a:spcAft>
             </a:pPr>
             <a:r>
               <a:rPr lang="en-US" altLang="ko-KR" sz="3200" b="1" dirty="0" smtClean="0">
@@ -26852,7 +26574,7 @@
         </p:nvSpPr>
         <p:spPr>
           <a:xfrm>
-            <a:off x="179512" y="51470"/>
+            <a:off x="179512" y="2830"/>
             <a:ext cx="8928992" cy="5044450"/>
           </a:xfrm>
           <a:prstGeom prst="rect">
@@ -26870,9 +26592,6 @@
               <a:lnSpc>
                 <a:spcPct val="110000"/>
               </a:lnSpc>
-              <a:spcAft>
-                <a:spcPts val="300"/>
-              </a:spcAft>
             </a:pPr>
             <a:r>
               <a:rPr lang="ko-KR" altLang="en-US" sz="3200" b="1" dirty="0" smtClean="0">
@@ -26930,9 +26649,6 @@
               <a:lnSpc>
                 <a:spcPct val="110000"/>
               </a:lnSpc>
-              <a:spcAft>
-                <a:spcPts val="300"/>
-              </a:spcAft>
             </a:pPr>
             <a:r>
               <a:rPr lang="ko-KR" altLang="en-US" sz="3200" b="1" dirty="0" smtClean="0">
@@ -27020,9 +26736,6 @@
               <a:lnSpc>
                 <a:spcPct val="110000"/>
               </a:lnSpc>
-              <a:spcAft>
-                <a:spcPts val="300"/>
-              </a:spcAft>
             </a:pPr>
             <a:r>
               <a:rPr lang="ko-KR" altLang="en-US" sz="3200" b="1" dirty="0" smtClean="0">
@@ -27084,255 +26797,6 @@
       </p:par>
     </p:tnLst>
   </p:timing>
-</p:sld>
-</file>
-
-<file path=ppt/slides/slide41.xml><?xml version="1.0" encoding="utf-8"?>
-<p:sld xmlns:a="http://schemas.openxmlformats.org/drawingml/2006/main" xmlns:p="http://schemas.openxmlformats.org/presentationml/2006/main" xmlns:r="http://schemas.openxmlformats.org/officeDocument/2006/relationships">
-  <p:cSld>
-    <p:bg>
-      <p:bgPr>
-        <a:solidFill>
-          <a:schemeClr val="tx1"/>
-        </a:solidFill>
-        <a:effectLst/>
-      </p:bgPr>
-    </p:bg>
-    <p:spTree>
-      <p:nvGrpSpPr>
-        <p:cNvPr id="1" name=""/>
-        <p:cNvGrpSpPr/>
-        <p:nvPr/>
-      </p:nvGrpSpPr>
-      <p:grpSpPr/>
-      <p:sp>
-        <p:nvSpPr>
-          <p:cNvPr id="9" name="Rectangle 8"/>
-          <p:cNvSpPr/>
-          <p:nvPr/>
-        </p:nvSpPr>
-        <p:spPr>
-          <a:xfrm>
-            <a:off x="209273" y="1079191"/>
-            <a:ext cx="8856984" cy="3867662"/>
-          </a:xfrm>
-          <a:prstGeom prst="rect">
-            <a:avLst/>
-          </a:prstGeom>
-        </p:spPr>
-        <p:txBody>
-          <a:bodyPr wrap="square">
-            <a:spAutoFit/>
-          </a:bodyPr>
-          <a:lstStyle/>
-          <a:p>
-            <a:pPr marL="625475" indent="-625475">
-              <a:lnSpc>
-                <a:spcPct val="150000"/>
-              </a:lnSpc>
-              <a:spcAft>
-                <a:spcPts val="1200"/>
-              </a:spcAft>
-            </a:pPr>
-            <a:r>
-              <a:rPr lang="ko-KR" altLang="en-US" sz="3000" b="1" dirty="0">
-                <a:solidFill>
-                  <a:schemeClr val="bg2">
-                    <a:lumMod val="90000"/>
-                  </a:schemeClr>
-                </a:solidFill>
-                <a:latin typeface="바탕" pitchFamily="18" charset="-127"/>
-                <a:ea typeface="바탕" pitchFamily="18" charset="-127"/>
-              </a:rPr>
-              <a:t>○</a:t>
-            </a:r>
-            <a:r>
-              <a:rPr lang="en-US" altLang="ko-KR" sz="3000" b="1" dirty="0">
-                <a:solidFill>
-                  <a:schemeClr val="bg2">
-                    <a:lumMod val="90000"/>
-                  </a:schemeClr>
-                </a:solidFill>
-                <a:latin typeface="바탕" pitchFamily="18" charset="-127"/>
-                <a:ea typeface="바탕" pitchFamily="18" charset="-127"/>
-              </a:rPr>
-              <a:t>  </a:t>
-            </a:r>
-            <a:r>
-              <a:rPr lang="ko-KR" altLang="en-US" sz="3200" b="1" dirty="0">
-                <a:solidFill>
-                  <a:srgbClr val="DDD9C3"/>
-                </a:solidFill>
-                <a:latin typeface="Batang" panose="02030600000101010101" pitchFamily="18" charset="-127"/>
-                <a:ea typeface="Batang" panose="02030600000101010101" pitchFamily="18" charset="-127"/>
-              </a:rPr>
-              <a:t>지극히 좋으신 하느님</a:t>
-            </a:r>
-            <a:r>
-              <a:rPr lang="en-US" altLang="ko-KR" sz="3200" b="1" dirty="0">
-                <a:solidFill>
-                  <a:srgbClr val="DDD9C3"/>
-                </a:solidFill>
-                <a:latin typeface="Batang" panose="02030600000101010101" pitchFamily="18" charset="-127"/>
-                <a:ea typeface="Batang" panose="02030600000101010101" pitchFamily="18" charset="-127"/>
-              </a:rPr>
-              <a:t>, </a:t>
-            </a:r>
-          </a:p>
-          <a:p>
-            <a:pPr marL="625475" indent="-625475">
-              <a:lnSpc>
-                <a:spcPct val="150000"/>
-              </a:lnSpc>
-              <a:spcAft>
-                <a:spcPts val="1200"/>
-              </a:spcAft>
-            </a:pPr>
-            <a:r>
-              <a:rPr lang="en-US" altLang="ko-KR" sz="3200" b="1" dirty="0">
-                <a:solidFill>
-                  <a:srgbClr val="DDD9C3"/>
-                </a:solidFill>
-                <a:latin typeface="Batang" panose="02030600000101010101" pitchFamily="18" charset="-127"/>
-                <a:ea typeface="Batang" panose="02030600000101010101" pitchFamily="18" charset="-127"/>
-              </a:rPr>
-              <a:t>	</a:t>
-            </a:r>
-            <a:r>
-              <a:rPr lang="ko-KR" altLang="en-US" sz="3200" b="1" dirty="0">
-                <a:solidFill>
-                  <a:srgbClr val="DDD9C3"/>
-                </a:solidFill>
-                <a:latin typeface="Batang" panose="02030600000101010101" pitchFamily="18" charset="-127"/>
-                <a:ea typeface="Batang" panose="02030600000101010101" pitchFamily="18" charset="-127"/>
-              </a:rPr>
-              <a:t>최양업 토마스 신부를 박해로 고통받는 교회의 든든한 목자로 세워 주셨음에 감사드리나이다</a:t>
-            </a:r>
-            <a:r>
-              <a:rPr lang="en-US" altLang="ko-KR" sz="3200" b="1" dirty="0">
-                <a:solidFill>
-                  <a:srgbClr val="DDD9C3"/>
-                </a:solidFill>
-                <a:latin typeface="Batang" panose="02030600000101010101" pitchFamily="18" charset="-127"/>
-                <a:ea typeface="Batang" panose="02030600000101010101" pitchFamily="18" charset="-127"/>
-              </a:rPr>
-              <a:t>.</a:t>
-            </a:r>
-          </a:p>
-          <a:p>
-            <a:pPr marL="625475" indent="-625475">
-              <a:lnSpc>
-                <a:spcPct val="120000"/>
-              </a:lnSpc>
-              <a:spcAft>
-                <a:spcPts val="1200"/>
-              </a:spcAft>
-            </a:pPr>
-            <a:endParaRPr lang="en-US" altLang="ko-KR" sz="3200" b="1" i="0" dirty="0">
-              <a:solidFill>
-                <a:srgbClr val="DDD9C3"/>
-              </a:solidFill>
-              <a:effectLst/>
-              <a:latin typeface="Batang" panose="02030600000101010101" pitchFamily="18" charset="-127"/>
-              <a:ea typeface="Batang" panose="02030600000101010101" pitchFamily="18" charset="-127"/>
-            </a:endParaRPr>
-          </a:p>
-        </p:txBody>
-      </p:sp>
-      <p:sp>
-        <p:nvSpPr>
-          <p:cNvPr id="3" name="object 3"/>
-          <p:cNvSpPr txBox="1">
-            <a:spLocks/>
-          </p:cNvSpPr>
-          <p:nvPr/>
-        </p:nvSpPr>
-        <p:spPr>
-          <a:xfrm>
-            <a:off x="827584" y="196647"/>
-            <a:ext cx="7272808" cy="430887"/>
-          </a:xfrm>
-          <a:prstGeom prst="rect">
-            <a:avLst/>
-          </a:prstGeom>
-        </p:spPr>
-        <p:txBody>
-          <a:bodyPr vert="horz" wrap="square" lIns="0" tIns="0" rIns="0" bIns="0" rtlCol="0">
-            <a:spAutoFit/>
-          </a:bodyPr>
-          <a:lstStyle>
-            <a:lvl1pPr>
-              <a:defRPr>
-                <a:latin typeface="+mj-lt"/>
-                <a:ea typeface="+mj-ea"/>
-                <a:cs typeface="+mj-cs"/>
-              </a:defRPr>
-            </a:lvl1pPr>
-          </a:lstStyle>
-          <a:p>
-            <a:pPr marL="9938" defTabSz="914400"/>
-            <a:r>
-              <a:rPr lang="ko-KR" altLang="en-US" sz="2800" kern="0" dirty="0">
-                <a:solidFill>
-                  <a:srgbClr val="FFC000"/>
-                </a:solidFill>
-                <a:latin typeface="궁서" pitchFamily="18" charset="-127"/>
-                <a:ea typeface="궁서" pitchFamily="18" charset="-127"/>
-              </a:rPr>
-              <a:t>가경자 최양업 토마스 신부 시복 시성 기도문</a:t>
-            </a:r>
-          </a:p>
-        </p:txBody>
-      </p:sp>
-      <p:sp>
-        <p:nvSpPr>
-          <p:cNvPr id="5" name="TextBox 4">
-            <a:extLst>
-              <a:ext uri="{FF2B5EF4-FFF2-40B4-BE49-F238E27FC236}">
-                <a16:creationId xmlns:a16="http://schemas.microsoft.com/office/drawing/2014/main" id="{678DF541-2D9C-4FDB-BFB1-A59A4B9A1C8F}"/>
-              </a:ext>
-            </a:extLst>
-          </p:cNvPr>
-          <p:cNvSpPr txBox="1"/>
-          <p:nvPr/>
-        </p:nvSpPr>
-        <p:spPr>
-          <a:xfrm>
-            <a:off x="6228184" y="4825685"/>
-            <a:ext cx="2808312" cy="215444"/>
-          </a:xfrm>
-          <a:prstGeom prst="rect">
-            <a:avLst/>
-          </a:prstGeom>
-          <a:noFill/>
-        </p:spPr>
-        <p:txBody>
-          <a:bodyPr wrap="square" lIns="0" tIns="0" rIns="0" bIns="0">
-            <a:spAutoFit/>
-          </a:bodyPr>
-          <a:lstStyle/>
-          <a:p>
-            <a:pPr algn="ctr"/>
-            <a:r>
-              <a:rPr lang="ko-KR" altLang="en-US" spc="-200" dirty="0">
-                <a:solidFill>
-                  <a:schemeClr val="bg1">
-                    <a:lumMod val="50000"/>
-                  </a:schemeClr>
-                </a:solidFill>
-                <a:latin typeface="궁서" panose="02030600000101010101" pitchFamily="18" charset="-127"/>
-                <a:ea typeface="궁서" panose="02030600000101010101" pitchFamily="18" charset="-127"/>
-              </a:rPr>
-              <a:t>가톨릭 기도서 ©  한국천주교중앙협의회</a:t>
-            </a:r>
-          </a:p>
-        </p:txBody>
-      </p:sp>
-    </p:spTree>
-  </p:cSld>
-  <p:clrMapOvr>
-    <a:masterClrMapping/>
-  </p:clrMapOvr>
 </p:sld>
 </file>
 
@@ -29197,7 +28661,7 @@
                 <a:latin typeface="바탕" pitchFamily="18" charset="-127"/>
                 <a:ea typeface="바탕" pitchFamily="18" charset="-127"/>
               </a:rPr>
-              <a:t>210</a:t>
+              <a:t>215</a:t>
             </a:r>
             <a:endParaRPr lang="en-US" altLang="ko-KR" sz="5200" b="1" spc="1500" dirty="0">
               <a:solidFill>
@@ -30725,7 +30189,7 @@
                 <a:latin typeface="바탕" pitchFamily="18" charset="-127"/>
                 <a:ea typeface="바탕" pitchFamily="18" charset="-127"/>
               </a:rPr>
-              <a:t>166</a:t>
+              <a:t>170</a:t>
             </a:r>
             <a:endParaRPr lang="ko-KR" altLang="en-US" sz="5200" b="1" spc="1500" dirty="0">
               <a:solidFill>
@@ -31243,7 +30707,7 @@
                 <a:latin typeface="바탕" pitchFamily="18" charset="-127"/>
                 <a:ea typeface="바탕" pitchFamily="18" charset="-127"/>
               </a:rPr>
-              <a:t>61</a:t>
+              <a:t>32</a:t>
             </a:r>
             <a:endParaRPr lang="en-US" altLang="ko-KR" sz="4800" b="1" spc="1500" dirty="0">
               <a:latin typeface="바탕" pitchFamily="18" charset="-127"/>
@@ -31293,6 +30757,849 @@
     <p:extLst>
       <p:ext uri="{BB962C8B-B14F-4D97-AF65-F5344CB8AC3E}">
         <p14:creationId xmlns="" xmlns:p14="http://schemas.microsoft.com/office/powerpoint/2010/main" val="1875219009"/>
+      </p:ext>
+    </p:extLst>
+  </p:cSld>
+  <p:clrMapOvr>
+    <a:masterClrMapping/>
+  </p:clrMapOvr>
+  <p:timing>
+    <p:tnLst>
+      <p:par>
+        <p:cTn id="1" dur="indefinite" restart="never" nodeType="tmRoot"/>
+      </p:par>
+    </p:tnLst>
+  </p:timing>
+</p:sld>
+</file>
+
+<file path=ppt/slides/slide62.xml><?xml version="1.0" encoding="utf-8"?>
+<p:sld xmlns:a="http://schemas.openxmlformats.org/drawingml/2006/main" xmlns:r="http://schemas.openxmlformats.org/officeDocument/2006/relationships" xmlns:p="http://schemas.openxmlformats.org/presentationml/2006/main" showMasterSp="0">
+  <p:cSld>
+    <p:spTree>
+      <p:nvGrpSpPr>
+        <p:cNvPr id="1" name=""/>
+        <p:cNvGrpSpPr/>
+        <p:nvPr/>
+      </p:nvGrpSpPr>
+      <p:grpSpPr>
+        <a:xfrm>
+          <a:off x="0" y="0"/>
+          <a:ext cx="0" cy="0"/>
+          <a:chOff x="0" y="0"/>
+          <a:chExt cx="0" cy="0"/>
+        </a:xfrm>
+      </p:grpSpPr>
+      <p:sp>
+        <p:nvSpPr>
+          <p:cNvPr id="9" name="Rectangle 8"/>
+          <p:cNvSpPr/>
+          <p:nvPr/>
+        </p:nvSpPr>
+        <p:spPr>
+          <a:xfrm>
+            <a:off x="209273" y="1079191"/>
+            <a:ext cx="8856984" cy="3867662"/>
+          </a:xfrm>
+          <a:prstGeom prst="rect">
+            <a:avLst/>
+          </a:prstGeom>
+        </p:spPr>
+        <p:txBody>
+          <a:bodyPr wrap="square">
+            <a:spAutoFit/>
+          </a:bodyPr>
+          <a:lstStyle/>
+          <a:p>
+            <a:pPr marL="625475" indent="-625475">
+              <a:lnSpc>
+                <a:spcPct val="150000"/>
+              </a:lnSpc>
+              <a:spcAft>
+                <a:spcPts val="1200"/>
+              </a:spcAft>
+            </a:pPr>
+            <a:r>
+              <a:rPr lang="ko-KR" altLang="en-US" sz="3000" b="1" dirty="0">
+                <a:solidFill>
+                  <a:srgbClr val="EEECE1">
+                    <a:lumMod val="90000"/>
+                  </a:srgbClr>
+                </a:solidFill>
+                <a:latin typeface="바탕" pitchFamily="18" charset="-127"/>
+                <a:ea typeface="바탕" pitchFamily="18" charset="-127"/>
+              </a:rPr>
+              <a:t>○</a:t>
+            </a:r>
+            <a:r>
+              <a:rPr lang="en-US" altLang="ko-KR" sz="3000" b="1" dirty="0">
+                <a:solidFill>
+                  <a:srgbClr val="EEECE1">
+                    <a:lumMod val="90000"/>
+                  </a:srgbClr>
+                </a:solidFill>
+                <a:latin typeface="바탕" pitchFamily="18" charset="-127"/>
+                <a:ea typeface="바탕" pitchFamily="18" charset="-127"/>
+              </a:rPr>
+              <a:t>  </a:t>
+            </a:r>
+            <a:r>
+              <a:rPr lang="ko-KR" altLang="en-US" sz="3200" b="1" dirty="0">
+                <a:solidFill>
+                  <a:srgbClr val="DDD9C3"/>
+                </a:solidFill>
+                <a:latin typeface="Batang" panose="02030600000101010101" pitchFamily="18" charset="-127"/>
+                <a:ea typeface="Batang" panose="02030600000101010101" pitchFamily="18" charset="-127"/>
+              </a:rPr>
+              <a:t>지극히 좋으신 하느님</a:t>
+            </a:r>
+            <a:r>
+              <a:rPr lang="en-US" altLang="ko-KR" sz="3200" b="1" dirty="0">
+                <a:solidFill>
+                  <a:srgbClr val="DDD9C3"/>
+                </a:solidFill>
+                <a:latin typeface="Batang" panose="02030600000101010101" pitchFamily="18" charset="-127"/>
+                <a:ea typeface="Batang" panose="02030600000101010101" pitchFamily="18" charset="-127"/>
+              </a:rPr>
+              <a:t>, </a:t>
+            </a:r>
+          </a:p>
+          <a:p>
+            <a:pPr marL="625475" indent="-625475">
+              <a:lnSpc>
+                <a:spcPct val="150000"/>
+              </a:lnSpc>
+              <a:spcAft>
+                <a:spcPts val="1200"/>
+              </a:spcAft>
+            </a:pPr>
+            <a:r>
+              <a:rPr lang="en-US" altLang="ko-KR" sz="3200" b="1" dirty="0">
+                <a:solidFill>
+                  <a:srgbClr val="DDD9C3"/>
+                </a:solidFill>
+                <a:latin typeface="Batang" panose="02030600000101010101" pitchFamily="18" charset="-127"/>
+                <a:ea typeface="Batang" panose="02030600000101010101" pitchFamily="18" charset="-127"/>
+              </a:rPr>
+              <a:t>	</a:t>
+            </a:r>
+            <a:r>
+              <a:rPr lang="ko-KR" altLang="en-US" sz="3200" b="1" dirty="0">
+                <a:solidFill>
+                  <a:srgbClr val="DDD9C3"/>
+                </a:solidFill>
+                <a:latin typeface="Batang" panose="02030600000101010101" pitchFamily="18" charset="-127"/>
+                <a:ea typeface="Batang" panose="02030600000101010101" pitchFamily="18" charset="-127"/>
+              </a:rPr>
+              <a:t>최양업 토마스 신부를 박해로 고통받는 교회의 든든한 목자로 세워 주셨음에 감사드리나이다</a:t>
+            </a:r>
+            <a:r>
+              <a:rPr lang="en-US" altLang="ko-KR" sz="3200" b="1" dirty="0">
+                <a:solidFill>
+                  <a:srgbClr val="DDD9C3"/>
+                </a:solidFill>
+                <a:latin typeface="Batang" panose="02030600000101010101" pitchFamily="18" charset="-127"/>
+                <a:ea typeface="Batang" panose="02030600000101010101" pitchFamily="18" charset="-127"/>
+              </a:rPr>
+              <a:t>.</a:t>
+            </a:r>
+          </a:p>
+          <a:p>
+            <a:pPr marL="625475" indent="-625475">
+              <a:lnSpc>
+                <a:spcPct val="120000"/>
+              </a:lnSpc>
+              <a:spcAft>
+                <a:spcPts val="1200"/>
+              </a:spcAft>
+            </a:pPr>
+            <a:endParaRPr lang="en-US" altLang="ko-KR" sz="3200" b="1" dirty="0">
+              <a:solidFill>
+                <a:srgbClr val="DDD9C3"/>
+              </a:solidFill>
+              <a:latin typeface="Batang" panose="02030600000101010101" pitchFamily="18" charset="-127"/>
+              <a:ea typeface="Batang" panose="02030600000101010101" pitchFamily="18" charset="-127"/>
+            </a:endParaRPr>
+          </a:p>
+        </p:txBody>
+      </p:sp>
+      <p:sp>
+        <p:nvSpPr>
+          <p:cNvPr id="3" name="object 3"/>
+          <p:cNvSpPr txBox="1">
+            <a:spLocks/>
+          </p:cNvSpPr>
+          <p:nvPr/>
+        </p:nvSpPr>
+        <p:spPr>
+          <a:xfrm>
+            <a:off x="827584" y="196647"/>
+            <a:ext cx="7272808" cy="430887"/>
+          </a:xfrm>
+          <a:prstGeom prst="rect">
+            <a:avLst/>
+          </a:prstGeom>
+        </p:spPr>
+        <p:txBody>
+          <a:bodyPr vert="horz" wrap="square" lIns="0" tIns="0" rIns="0" bIns="0" rtlCol="0">
+            <a:spAutoFit/>
+          </a:bodyPr>
+          <a:lstStyle>
+            <a:lvl1pPr>
+              <a:defRPr>
+                <a:latin typeface="+mj-lt"/>
+                <a:ea typeface="+mj-ea"/>
+                <a:cs typeface="+mj-cs"/>
+              </a:defRPr>
+            </a:lvl1pPr>
+          </a:lstStyle>
+          <a:p>
+            <a:pPr marL="9938" defTabSz="914400"/>
+            <a:r>
+              <a:rPr lang="ko-KR" altLang="en-US" sz="2800" kern="0" dirty="0">
+                <a:solidFill>
+                  <a:srgbClr val="FFC000"/>
+                </a:solidFill>
+                <a:latin typeface="궁서" pitchFamily="18" charset="-127"/>
+                <a:ea typeface="궁서" pitchFamily="18" charset="-127"/>
+              </a:rPr>
+              <a:t>가경자 최양업 토마스 신부 시복 시성 기도문</a:t>
+            </a:r>
+          </a:p>
+        </p:txBody>
+      </p:sp>
+      <p:sp>
+        <p:nvSpPr>
+          <p:cNvPr id="5" name="TextBox 4">
+            <a:extLst>
+              <a:ext uri="{FF2B5EF4-FFF2-40B4-BE49-F238E27FC236}">
+                <a16:creationId xmlns:a16="http://schemas.microsoft.com/office/drawing/2014/main" xmlns="" id="{678DF541-2D9C-4FDB-BFB1-A59A4B9A1C8F}"/>
+              </a:ext>
+            </a:extLst>
+          </p:cNvPr>
+          <p:cNvSpPr txBox="1"/>
+          <p:nvPr/>
+        </p:nvSpPr>
+        <p:spPr>
+          <a:xfrm>
+            <a:off x="6228184" y="4825685"/>
+            <a:ext cx="2808312" cy="215444"/>
+          </a:xfrm>
+          <a:prstGeom prst="rect">
+            <a:avLst/>
+          </a:prstGeom>
+          <a:noFill/>
+        </p:spPr>
+        <p:txBody>
+          <a:bodyPr wrap="square" lIns="0" tIns="0" rIns="0" bIns="0">
+            <a:spAutoFit/>
+          </a:bodyPr>
+          <a:lstStyle/>
+          <a:p>
+            <a:pPr algn="ctr"/>
+            <a:r>
+              <a:rPr lang="ko-KR" altLang="en-US" spc="-200" dirty="0">
+                <a:solidFill>
+                  <a:prstClr val="white">
+                    <a:lumMod val="50000"/>
+                  </a:prstClr>
+                </a:solidFill>
+                <a:latin typeface="궁서" panose="02030600000101010101" pitchFamily="18" charset="-127"/>
+                <a:ea typeface="궁서" panose="02030600000101010101" pitchFamily="18" charset="-127"/>
+              </a:rPr>
+              <a:t>가톨릭 기도서 ©  한국천주교중앙협의회</a:t>
+            </a:r>
+          </a:p>
+        </p:txBody>
+      </p:sp>
+    </p:spTree>
+    <p:extLst>
+      <p:ext uri="{BB962C8B-B14F-4D97-AF65-F5344CB8AC3E}">
+        <p14:creationId xmlns:p14="http://schemas.microsoft.com/office/powerpoint/2010/main" xmlns="" val="2190241959"/>
+      </p:ext>
+    </p:extLst>
+  </p:cSld>
+  <p:clrMapOvr>
+    <a:masterClrMapping/>
+  </p:clrMapOvr>
+  <p:timing>
+    <p:tnLst>
+      <p:par>
+        <p:cTn id="1" dur="indefinite" restart="never" nodeType="tmRoot"/>
+      </p:par>
+    </p:tnLst>
+  </p:timing>
+</p:sld>
+</file>
+
+<file path=ppt/slides/slide63.xml><?xml version="1.0" encoding="utf-8"?>
+<p:sld xmlns:a="http://schemas.openxmlformats.org/drawingml/2006/main" xmlns:r="http://schemas.openxmlformats.org/officeDocument/2006/relationships" xmlns:p="http://schemas.openxmlformats.org/presentationml/2006/main" showMasterSp="0">
+  <p:cSld>
+    <p:spTree>
+      <p:nvGrpSpPr>
+        <p:cNvPr id="1" name=""/>
+        <p:cNvGrpSpPr/>
+        <p:nvPr/>
+      </p:nvGrpSpPr>
+      <p:grpSpPr>
+        <a:xfrm>
+          <a:off x="0" y="0"/>
+          <a:ext cx="0" cy="0"/>
+          <a:chOff x="0" y="0"/>
+          <a:chExt cx="0" cy="0"/>
+        </a:xfrm>
+      </p:grpSpPr>
+      <p:sp>
+        <p:nvSpPr>
+          <p:cNvPr id="9" name="Rectangle 8"/>
+          <p:cNvSpPr/>
+          <p:nvPr/>
+        </p:nvSpPr>
+        <p:spPr>
+          <a:xfrm>
+            <a:off x="78049" y="252036"/>
+            <a:ext cx="8991076" cy="4563237"/>
+          </a:xfrm>
+          <a:prstGeom prst="rect">
+            <a:avLst/>
+          </a:prstGeom>
+        </p:spPr>
+        <p:txBody>
+          <a:bodyPr wrap="square">
+            <a:spAutoFit/>
+          </a:bodyPr>
+          <a:lstStyle/>
+          <a:p>
+            <a:pPr marL="625475" indent="-625475">
+              <a:lnSpc>
+                <a:spcPct val="150000"/>
+              </a:lnSpc>
+              <a:spcAft>
+                <a:spcPts val="1200"/>
+              </a:spcAft>
+            </a:pPr>
+            <a:r>
+              <a:rPr lang="ko-KR" altLang="en-US" sz="3200" dirty="0">
+                <a:solidFill>
+                  <a:prstClr val="white"/>
+                </a:solidFill>
+                <a:latin typeface="바탕" pitchFamily="18" charset="-127"/>
+                <a:ea typeface="바탕" pitchFamily="18" charset="-127"/>
+              </a:rPr>
+              <a:t>●</a:t>
+            </a:r>
+            <a:r>
+              <a:rPr lang="en-US" altLang="ko-KR" sz="3200" b="1" dirty="0">
+                <a:solidFill>
+                  <a:srgbClr val="DDD9C3"/>
+                </a:solidFill>
+                <a:latin typeface="Batang" panose="02030600000101010101" pitchFamily="18" charset="-127"/>
+                <a:ea typeface="Batang" panose="02030600000101010101" pitchFamily="18" charset="-127"/>
+              </a:rPr>
+              <a:t> 	</a:t>
+            </a:r>
+            <a:r>
+              <a:rPr lang="ko-KR" altLang="en-US" sz="3200" b="1" dirty="0">
+                <a:solidFill>
+                  <a:prstClr val="white"/>
+                </a:solidFill>
+                <a:latin typeface="Batang" panose="02030600000101010101" pitchFamily="18" charset="-127"/>
+                <a:ea typeface="Batang" panose="02030600000101010101" pitchFamily="18" charset="-127"/>
+              </a:rPr>
+              <a:t>모든 교우들이 오로지 하느님 자비에 희망을 두고 박해를 피해 산골 깊이 숨어 신앙을 지켜야 했던 시대에 최양업 토마스 신부는 주님을 닮은 착한 목자로 목숨이 다할 때까지 쉼 없이 양들을 찾아 복음을 전하고 주님께서 이루신 구원의 은총을 전했나이다</a:t>
+            </a:r>
+            <a:r>
+              <a:rPr lang="en-AU" altLang="ko-KR" sz="3200" b="1" dirty="0">
+                <a:solidFill>
+                  <a:prstClr val="white"/>
+                </a:solidFill>
+                <a:latin typeface="Batang" panose="02030600000101010101" pitchFamily="18" charset="-127"/>
+                <a:ea typeface="Batang" panose="02030600000101010101" pitchFamily="18" charset="-127"/>
+              </a:rPr>
+              <a:t>.</a:t>
+            </a:r>
+            <a:endParaRPr lang="en-US" altLang="ko-KR" sz="3200" b="1" dirty="0">
+              <a:solidFill>
+                <a:prstClr val="white"/>
+              </a:solidFill>
+              <a:latin typeface="Batang" panose="02030600000101010101" pitchFamily="18" charset="-127"/>
+              <a:ea typeface="Batang" panose="02030600000101010101" pitchFamily="18" charset="-127"/>
+            </a:endParaRPr>
+          </a:p>
+        </p:txBody>
+      </p:sp>
+      <p:sp>
+        <p:nvSpPr>
+          <p:cNvPr id="5" name="TextBox 4">
+            <a:extLst>
+              <a:ext uri="{FF2B5EF4-FFF2-40B4-BE49-F238E27FC236}">
+                <a16:creationId xmlns:a16="http://schemas.microsoft.com/office/drawing/2014/main" xmlns="" id="{854A94FA-B5D4-48DC-994C-9FCB87C8A2E9}"/>
+              </a:ext>
+            </a:extLst>
+          </p:cNvPr>
+          <p:cNvSpPr txBox="1"/>
+          <p:nvPr/>
+        </p:nvSpPr>
+        <p:spPr>
+          <a:xfrm>
+            <a:off x="6228184" y="4825685"/>
+            <a:ext cx="2808312" cy="215444"/>
+          </a:xfrm>
+          <a:prstGeom prst="rect">
+            <a:avLst/>
+          </a:prstGeom>
+          <a:noFill/>
+        </p:spPr>
+        <p:txBody>
+          <a:bodyPr wrap="square" lIns="0" tIns="0" rIns="0" bIns="0">
+            <a:spAutoFit/>
+          </a:bodyPr>
+          <a:lstStyle/>
+          <a:p>
+            <a:pPr algn="ctr"/>
+            <a:r>
+              <a:rPr lang="ko-KR" altLang="en-US" spc="-200" dirty="0">
+                <a:solidFill>
+                  <a:prstClr val="white">
+                    <a:lumMod val="50000"/>
+                  </a:prstClr>
+                </a:solidFill>
+                <a:latin typeface="궁서" panose="02030600000101010101" pitchFamily="18" charset="-127"/>
+                <a:ea typeface="궁서" panose="02030600000101010101" pitchFamily="18" charset="-127"/>
+              </a:rPr>
+              <a:t>가톨릭 기도서 © 한국천주교중앙협의회</a:t>
+            </a:r>
+          </a:p>
+        </p:txBody>
+      </p:sp>
+    </p:spTree>
+    <p:extLst>
+      <p:ext uri="{BB962C8B-B14F-4D97-AF65-F5344CB8AC3E}">
+        <p14:creationId xmlns:p14="http://schemas.microsoft.com/office/powerpoint/2010/main" xmlns="" val="1308187922"/>
+      </p:ext>
+    </p:extLst>
+  </p:cSld>
+  <p:clrMapOvr>
+    <a:masterClrMapping/>
+  </p:clrMapOvr>
+  <p:timing>
+    <p:tnLst>
+      <p:par>
+        <p:cTn id="1" dur="indefinite" restart="never" nodeType="tmRoot"/>
+      </p:par>
+    </p:tnLst>
+  </p:timing>
+</p:sld>
+</file>
+
+<file path=ppt/slides/slide64.xml><?xml version="1.0" encoding="utf-8"?>
+<p:sld xmlns:a="http://schemas.openxmlformats.org/drawingml/2006/main" xmlns:r="http://schemas.openxmlformats.org/officeDocument/2006/relationships" xmlns:p="http://schemas.openxmlformats.org/presentationml/2006/main" showMasterSp="0">
+  <p:cSld>
+    <p:spTree>
+      <p:nvGrpSpPr>
+        <p:cNvPr id="1" name=""/>
+        <p:cNvGrpSpPr/>
+        <p:nvPr/>
+      </p:nvGrpSpPr>
+      <p:grpSpPr>
+        <a:xfrm>
+          <a:off x="0" y="0"/>
+          <a:ext cx="0" cy="0"/>
+          <a:chOff x="0" y="0"/>
+          <a:chExt cx="0" cy="0"/>
+        </a:xfrm>
+      </p:grpSpPr>
+      <p:sp>
+        <p:nvSpPr>
+          <p:cNvPr id="9" name="Rectangle 8"/>
+          <p:cNvSpPr/>
+          <p:nvPr/>
+        </p:nvSpPr>
+        <p:spPr>
+          <a:xfrm>
+            <a:off x="179512" y="537763"/>
+            <a:ext cx="8784976" cy="3701463"/>
+          </a:xfrm>
+          <a:prstGeom prst="rect">
+            <a:avLst/>
+          </a:prstGeom>
+        </p:spPr>
+        <p:txBody>
+          <a:bodyPr wrap="square">
+            <a:spAutoFit/>
+          </a:bodyPr>
+          <a:lstStyle/>
+          <a:p>
+            <a:pPr marL="717550" indent="-717550">
+              <a:lnSpc>
+                <a:spcPct val="125000"/>
+              </a:lnSpc>
+              <a:spcAft>
+                <a:spcPts val="1200"/>
+              </a:spcAft>
+            </a:pPr>
+            <a:r>
+              <a:rPr lang="ko-KR" altLang="en-US" sz="3000" b="1" dirty="0">
+                <a:solidFill>
+                  <a:srgbClr val="EEECE1">
+                    <a:lumMod val="90000"/>
+                  </a:srgbClr>
+                </a:solidFill>
+                <a:latin typeface="바탕" pitchFamily="18" charset="-127"/>
+                <a:ea typeface="바탕" pitchFamily="18" charset="-127"/>
+              </a:rPr>
+              <a:t>○</a:t>
+            </a:r>
+            <a:r>
+              <a:rPr lang="en-US" altLang="ko-KR" sz="3000" b="1" dirty="0">
+                <a:solidFill>
+                  <a:srgbClr val="EEECE1">
+                    <a:lumMod val="90000"/>
+                  </a:srgbClr>
+                </a:solidFill>
+                <a:latin typeface="바탕" pitchFamily="18" charset="-127"/>
+                <a:ea typeface="바탕" pitchFamily="18" charset="-127"/>
+              </a:rPr>
+              <a:t>  	</a:t>
+            </a:r>
+            <a:r>
+              <a:rPr lang="ko-KR" altLang="en-US" sz="3200" b="1" dirty="0">
+                <a:solidFill>
+                  <a:srgbClr val="DDD9C3"/>
+                </a:solidFill>
+                <a:latin typeface="Batang" panose="02030600000101010101" pitchFamily="18" charset="-127"/>
+                <a:ea typeface="Batang" panose="02030600000101010101" pitchFamily="18" charset="-127"/>
+              </a:rPr>
+              <a:t>자비로우신 하느님 아버지</a:t>
+            </a:r>
+            <a:r>
+              <a:rPr lang="en-US" altLang="ko-KR" sz="3200" b="1" dirty="0">
+                <a:solidFill>
+                  <a:srgbClr val="DDD9C3"/>
+                </a:solidFill>
+                <a:latin typeface="Batang" panose="02030600000101010101" pitchFamily="18" charset="-127"/>
+                <a:ea typeface="Batang" panose="02030600000101010101" pitchFamily="18" charset="-127"/>
+              </a:rPr>
+              <a:t>, </a:t>
+            </a:r>
+            <a:r>
+              <a:rPr lang="ko-KR" altLang="en-US" sz="3200" b="1" dirty="0">
+                <a:solidFill>
+                  <a:srgbClr val="DDD9C3"/>
+                </a:solidFill>
+                <a:latin typeface="Batang" panose="02030600000101010101" pitchFamily="18" charset="-127"/>
+                <a:ea typeface="Batang" panose="02030600000101010101" pitchFamily="18" charset="-127"/>
+              </a:rPr>
+              <a:t>간절히 청하오니 가경자 최양업 토마스 신부에게 시복 시성의 은혜를 허락하시어 그에게 주셨던 굳건한 믿음과 온전한 헌신의 정신을 본받아 오늘 저희도 한마음으로 복음을 살고 전하는 일꾼이 되게 하소서</a:t>
+            </a:r>
+            <a:r>
+              <a:rPr lang="en-US" altLang="ko-KR" sz="3200" b="1" dirty="0">
+                <a:solidFill>
+                  <a:srgbClr val="DDD9C3"/>
+                </a:solidFill>
+                <a:latin typeface="Batang" panose="02030600000101010101" pitchFamily="18" charset="-127"/>
+                <a:ea typeface="Batang" panose="02030600000101010101" pitchFamily="18" charset="-127"/>
+              </a:rPr>
+              <a:t>.</a:t>
+            </a:r>
+            <a:endParaRPr lang="en-US" altLang="ko-KR" sz="3200" b="1" dirty="0">
+              <a:solidFill>
+                <a:prstClr val="white"/>
+              </a:solidFill>
+              <a:latin typeface="Batang" panose="02030600000101010101" pitchFamily="18" charset="-127"/>
+              <a:ea typeface="Batang" panose="02030600000101010101" pitchFamily="18" charset="-127"/>
+            </a:endParaRPr>
+          </a:p>
+        </p:txBody>
+      </p:sp>
+      <p:sp>
+        <p:nvSpPr>
+          <p:cNvPr id="4" name="TextBox 3">
+            <a:extLst>
+              <a:ext uri="{FF2B5EF4-FFF2-40B4-BE49-F238E27FC236}">
+                <a16:creationId xmlns:a16="http://schemas.microsoft.com/office/drawing/2014/main" xmlns="" id="{67C8B50A-87C0-41C7-83D4-96B95F8F1E2D}"/>
+              </a:ext>
+            </a:extLst>
+          </p:cNvPr>
+          <p:cNvSpPr txBox="1"/>
+          <p:nvPr/>
+        </p:nvSpPr>
+        <p:spPr>
+          <a:xfrm>
+            <a:off x="6228184" y="4825685"/>
+            <a:ext cx="2808312" cy="215444"/>
+          </a:xfrm>
+          <a:prstGeom prst="rect">
+            <a:avLst/>
+          </a:prstGeom>
+          <a:noFill/>
+        </p:spPr>
+        <p:txBody>
+          <a:bodyPr wrap="square" lIns="0" tIns="0" rIns="0" bIns="0">
+            <a:spAutoFit/>
+          </a:bodyPr>
+          <a:lstStyle/>
+          <a:p>
+            <a:pPr algn="ctr"/>
+            <a:r>
+              <a:rPr lang="ko-KR" altLang="en-US" spc="-200" dirty="0">
+                <a:solidFill>
+                  <a:prstClr val="white">
+                    <a:lumMod val="50000"/>
+                  </a:prstClr>
+                </a:solidFill>
+                <a:latin typeface="궁서" panose="02030600000101010101" pitchFamily="18" charset="-127"/>
+                <a:ea typeface="궁서" panose="02030600000101010101" pitchFamily="18" charset="-127"/>
+              </a:rPr>
+              <a:t>가톨릭 기도서 © 한국천주교중앙협의회</a:t>
+            </a:r>
+          </a:p>
+        </p:txBody>
+      </p:sp>
+    </p:spTree>
+    <p:extLst>
+      <p:ext uri="{BB962C8B-B14F-4D97-AF65-F5344CB8AC3E}">
+        <p14:creationId xmlns:p14="http://schemas.microsoft.com/office/powerpoint/2010/main" xmlns="" val="3585405468"/>
+      </p:ext>
+    </p:extLst>
+  </p:cSld>
+  <p:clrMapOvr>
+    <a:masterClrMapping/>
+  </p:clrMapOvr>
+  <p:timing>
+    <p:tnLst>
+      <p:par>
+        <p:cTn id="1" dur="indefinite" restart="never" nodeType="tmRoot"/>
+      </p:par>
+    </p:tnLst>
+  </p:timing>
+</p:sld>
+</file>
+
+<file path=ppt/slides/slide65.xml><?xml version="1.0" encoding="utf-8"?>
+<p:sld xmlns:a="http://schemas.openxmlformats.org/drawingml/2006/main" xmlns:r="http://schemas.openxmlformats.org/officeDocument/2006/relationships" xmlns:p="http://schemas.openxmlformats.org/presentationml/2006/main" showMasterSp="0">
+  <p:cSld>
+    <p:spTree>
+      <p:nvGrpSpPr>
+        <p:cNvPr id="1" name=""/>
+        <p:cNvGrpSpPr/>
+        <p:nvPr/>
+      </p:nvGrpSpPr>
+      <p:grpSpPr>
+        <a:xfrm>
+          <a:off x="0" y="0"/>
+          <a:ext cx="0" cy="0"/>
+          <a:chOff x="0" y="0"/>
+          <a:chExt cx="0" cy="0"/>
+        </a:xfrm>
+      </p:grpSpPr>
+      <p:sp>
+        <p:nvSpPr>
+          <p:cNvPr id="9" name="Rectangle 8"/>
+          <p:cNvSpPr/>
+          <p:nvPr/>
+        </p:nvSpPr>
+        <p:spPr>
+          <a:xfrm>
+            <a:off x="35496" y="102371"/>
+            <a:ext cx="9073008" cy="4816703"/>
+          </a:xfrm>
+          <a:prstGeom prst="rect">
+            <a:avLst/>
+          </a:prstGeom>
+        </p:spPr>
+        <p:txBody>
+          <a:bodyPr wrap="square">
+            <a:spAutoFit/>
+          </a:bodyPr>
+          <a:lstStyle/>
+          <a:p>
+            <a:pPr marL="625475" indent="-625475">
+              <a:lnSpc>
+                <a:spcPct val="150000"/>
+              </a:lnSpc>
+              <a:spcAft>
+                <a:spcPts val="2400"/>
+              </a:spcAft>
+            </a:pPr>
+            <a:r>
+              <a:rPr lang="ko-KR" altLang="en-US" sz="3200" dirty="0">
+                <a:solidFill>
+                  <a:prstClr val="white"/>
+                </a:solidFill>
+                <a:latin typeface="바탕" pitchFamily="18" charset="-127"/>
+                <a:ea typeface="바탕" pitchFamily="18" charset="-127"/>
+              </a:rPr>
+              <a:t>●</a:t>
+            </a:r>
+            <a:r>
+              <a:rPr lang="en-US" altLang="ko-KR" sz="3200" b="1" dirty="0">
+                <a:solidFill>
+                  <a:srgbClr val="DDD9C3"/>
+                </a:solidFill>
+                <a:latin typeface="Batang" panose="02030600000101010101" pitchFamily="18" charset="-127"/>
+                <a:ea typeface="Batang" panose="02030600000101010101" pitchFamily="18" charset="-127"/>
+              </a:rPr>
+              <a:t> </a:t>
+            </a:r>
+            <a:r>
+              <a:rPr lang="en-AU" altLang="ko-KR" sz="4000" dirty="0">
+                <a:solidFill>
+                  <a:srgbClr val="444444"/>
+                </a:solidFill>
+                <a:latin typeface="Nanum Gothic Thin"/>
+                <a:ea typeface="Batang" panose="02030600000101010101" pitchFamily="18" charset="-127"/>
+              </a:rPr>
+              <a:t>	</a:t>
+            </a:r>
+            <a:r>
+              <a:rPr lang="ko-KR" altLang="en-US" sz="3200" b="1" spc="-50" dirty="0">
+                <a:solidFill>
+                  <a:prstClr val="white"/>
+                </a:solidFill>
+                <a:latin typeface="Batang" panose="02030600000101010101" pitchFamily="18" charset="-127"/>
+                <a:ea typeface="Batang" panose="02030600000101010101" pitchFamily="18" charset="-127"/>
+              </a:rPr>
+              <a:t>저희는 가경자 최양업 신부의 시복 시성의 은총을 빌며 그의 전구에 힘입어 브로큰베이 한인천주교회를 위하여 기도드리오니 들어주소서</a:t>
+            </a:r>
+            <a:r>
+              <a:rPr lang="en-US" altLang="ko-KR" sz="3200" b="1" spc="-50" dirty="0">
+                <a:solidFill>
+                  <a:prstClr val="white"/>
+                </a:solidFill>
+                <a:latin typeface="Batang" panose="02030600000101010101" pitchFamily="18" charset="-127"/>
+                <a:ea typeface="Batang" panose="02030600000101010101" pitchFamily="18" charset="-127"/>
+              </a:rPr>
+              <a:t>. </a:t>
+            </a:r>
+            <a:r>
+              <a:rPr lang="ko-KR" altLang="en-US" sz="3200" b="1" spc="-50" dirty="0">
+                <a:solidFill>
+                  <a:prstClr val="white"/>
+                </a:solidFill>
+                <a:latin typeface="Batang" panose="02030600000101010101" pitchFamily="18" charset="-127"/>
+                <a:ea typeface="Batang" panose="02030600000101010101" pitchFamily="18" charset="-127"/>
+              </a:rPr>
+              <a:t>우리 주 그리스도를 통하여 비나이다</a:t>
+            </a:r>
+            <a:r>
+              <a:rPr lang="en-US" altLang="ko-KR" sz="3200" b="1" spc="-50" dirty="0">
+                <a:solidFill>
+                  <a:prstClr val="white"/>
+                </a:solidFill>
+                <a:latin typeface="Batang" panose="02030600000101010101" pitchFamily="18" charset="-127"/>
+                <a:ea typeface="Batang" panose="02030600000101010101" pitchFamily="18" charset="-127"/>
+              </a:rPr>
+              <a:t>.</a:t>
+            </a:r>
+            <a:r>
+              <a:rPr lang="en-US" altLang="ko-KR" sz="3200" b="1" dirty="0">
+                <a:solidFill>
+                  <a:prstClr val="white"/>
+                </a:solidFill>
+                <a:latin typeface="Batang" panose="02030600000101010101" pitchFamily="18" charset="-127"/>
+                <a:ea typeface="Batang" panose="02030600000101010101" pitchFamily="18" charset="-127"/>
+              </a:rPr>
+              <a:t>     </a:t>
+            </a:r>
+          </a:p>
+          <a:p>
+            <a:pPr marL="625475" indent="-625475">
+              <a:spcAft>
+                <a:spcPts val="1200"/>
+              </a:spcAft>
+            </a:pPr>
+            <a:r>
+              <a:rPr lang="ko-KR" altLang="en-US" sz="3500" b="1" dirty="0">
+                <a:solidFill>
+                  <a:prstClr val="white"/>
+                </a:solidFill>
+                <a:latin typeface="바탕" panose="02030600000101010101" pitchFamily="18" charset="-127"/>
+                <a:ea typeface="바탕" panose="02030600000101010101" pitchFamily="18" charset="-127"/>
+              </a:rPr>
+              <a:t>◎</a:t>
+            </a:r>
+            <a:r>
+              <a:rPr lang="en-US" altLang="ko-KR" sz="3500" b="1" dirty="0">
+                <a:solidFill>
+                  <a:prstClr val="white"/>
+                </a:solidFill>
+                <a:latin typeface="바탕" panose="02030600000101010101" pitchFamily="18" charset="-127"/>
+                <a:ea typeface="바탕" panose="02030600000101010101" pitchFamily="18" charset="-127"/>
+              </a:rPr>
+              <a:t>		</a:t>
+            </a:r>
+            <a:r>
+              <a:rPr lang="ko-KR" altLang="en-US" sz="3500" b="1" dirty="0">
+                <a:solidFill>
+                  <a:prstClr val="white"/>
+                </a:solidFill>
+                <a:latin typeface="바탕" panose="02030600000101010101" pitchFamily="18" charset="-127"/>
+                <a:ea typeface="바탕" panose="02030600000101010101" pitchFamily="18" charset="-127"/>
+              </a:rPr>
+              <a:t>아 멘</a:t>
+            </a:r>
+            <a:r>
+              <a:rPr lang="en-US" altLang="ko-KR" sz="3500" b="1" dirty="0">
+                <a:solidFill>
+                  <a:prstClr val="white"/>
+                </a:solidFill>
+                <a:latin typeface="바탕" panose="02030600000101010101" pitchFamily="18" charset="-127"/>
+                <a:ea typeface="바탕" panose="02030600000101010101" pitchFamily="18" charset="-127"/>
+              </a:rPr>
+              <a:t>.</a:t>
+            </a:r>
+          </a:p>
+        </p:txBody>
+      </p:sp>
+      <p:sp>
+        <p:nvSpPr>
+          <p:cNvPr id="4" name="TextBox 3">
+            <a:extLst>
+              <a:ext uri="{FF2B5EF4-FFF2-40B4-BE49-F238E27FC236}">
+                <a16:creationId xmlns:a16="http://schemas.microsoft.com/office/drawing/2014/main" xmlns="" id="{3C196F71-023D-4BE4-8EE4-DF4BF5614C97}"/>
+              </a:ext>
+            </a:extLst>
+          </p:cNvPr>
+          <p:cNvSpPr txBox="1"/>
+          <p:nvPr/>
+        </p:nvSpPr>
+        <p:spPr>
+          <a:xfrm>
+            <a:off x="6228184" y="4825685"/>
+            <a:ext cx="2808312" cy="215444"/>
+          </a:xfrm>
+          <a:prstGeom prst="rect">
+            <a:avLst/>
+          </a:prstGeom>
+          <a:noFill/>
+        </p:spPr>
+        <p:txBody>
+          <a:bodyPr wrap="square" lIns="0" tIns="0" rIns="0" bIns="0">
+            <a:spAutoFit/>
+          </a:bodyPr>
+          <a:lstStyle/>
+          <a:p>
+            <a:pPr algn="ctr"/>
+            <a:r>
+              <a:rPr lang="ko-KR" altLang="en-US" spc="-200" dirty="0">
+                <a:solidFill>
+                  <a:prstClr val="white">
+                    <a:lumMod val="50000"/>
+                  </a:prstClr>
+                </a:solidFill>
+                <a:latin typeface="궁서" panose="02030600000101010101" pitchFamily="18" charset="-127"/>
+                <a:ea typeface="궁서" panose="02030600000101010101" pitchFamily="18" charset="-127"/>
+              </a:rPr>
+              <a:t>가톨릭 기도서 © 한국천주교중앙협의회</a:t>
+            </a:r>
+          </a:p>
+        </p:txBody>
+      </p:sp>
+    </p:spTree>
+    <p:extLst>
+      <p:ext uri="{BB962C8B-B14F-4D97-AF65-F5344CB8AC3E}">
+        <p14:creationId xmlns:p14="http://schemas.microsoft.com/office/powerpoint/2010/main" xmlns="" val="585637866"/>
       </p:ext>
     </p:extLst>
   </p:cSld>
